--- a/lecons/F3/07_FORM4_PRACTICAL_WORK2_Calculation_of_Time_and_Date.pptx
+++ b/lecons/F3/07_FORM4_PRACTICAL_WORK2_Calculation_of_Time_and_Date.pptx
@@ -51,9 +51,13 @@
     <p:sldId id="299" r:id="rId45"/>
     <p:sldId id="300" r:id="rId46"/>
     <p:sldId id="301" r:id="rId47"/>
+    <p:sldId id="302" r:id="rId48"/>
+    <p:sldId id="303" r:id="rId49"/>
+    <p:sldId id="304" r:id="rId50"/>
+    <p:sldId id="305" r:id="rId51"/>
   </p:sldIdLst>
   <p:notesMasterIdLst>
-    <p:notesMasterId r:id="rId48"/>
+    <p:notesMasterId r:id="rId52"/>
   </p:notesMasterIdLst>
   <p:sldSz cx="12192000" cy="6858000"/>
   <p:notesSz cx="6858000" cy="12192000"/>
@@ -635,7 +639,7 @@
           <a:p>
             <a:r>
               <a:rPr lang="en-US" dirty="0"/>
-              <a:t>Listen carefully to this situation from real life. A World Cup match in Los Angeles starts at 5 p.m. on Sunday, local time (GMT − 7). Moussa and his friends in Garoua want to watch it live. They must calculate the time in Garoua. Think about it, because I am going to ask you some questions.</a:t>
+              <a:t>Listen carefully to this situation from real life. A World Cup match in Los Angeles (GMT − 7) starts at 5 p.m. on Sunday, local time. Moussa and his friends in Garoua (GMT + 1) want to watch it live. Moussa asks: "At what time and on what day must we switch on the television?" Think about it, because I am going to ask you some questions.</a:t>
             </a:r>
             <a:endParaRPr lang="en-US" dirty="0"/>
           </a:p>
@@ -811,7 +815,7 @@
           <a:p>
             <a:r>
               <a:rPr lang="en-US" dirty="0"/>
-              <a:t>Good. Moussa must find the time of the match in Garoua.</a:t>
+              <a:t>Good. Moussa must calculate the time and the day of the match in Garoua.</a:t>
             </a:r>
             <a:endParaRPr lang="en-US" dirty="0"/>
           </a:p>
@@ -1427,7 +1431,7 @@
           <a:p>
             <a:r>
               <a:rPr lang="en-US" dirty="0"/>
-              <a:t>Activity 1. Look carefully at this diagram: the rules of time. Observe every detail before I ask the question.</a:t>
+              <a:t>Activity 1. Look carefully at this diagram: a worked example. Observe every detail before I ask the question.</a:t>
             </a:r>
             <a:endParaRPr lang="en-US" dirty="0"/>
           </a:p>
@@ -1603,7 +1607,7 @@
           <a:p>
             <a:r>
               <a:rPr lang="en-US" dirty="0"/>
-              <a:t>Here is the question for Activity 1: Going east, do we add or remove time? And going west? Take one minute to think and write your answer in your rough notebook.</a:t>
+              <a:t>Here is the question for Activity 1: It is 12:00 in Garoua (13° E). What is the local time at 43° E? Take one minute to think and write your answer in your rough notebook.</a:t>
             </a:r>
             <a:endParaRPr lang="en-US" dirty="0"/>
           </a:p>
@@ -1691,7 +1695,7 @@
           <a:p>
             <a:r>
               <a:rPr lang="en-US" dirty="0"/>
-              <a:t>Let us check the answer together. East: we add. West: we remove.</a:t>
+              <a:t>Let us check the answer together. 14:00: the difference is 30°, which is 2 hours, and we add because the place is to the east.</a:t>
             </a:r>
             <a:endParaRPr lang="en-US" dirty="0"/>
           </a:p>
@@ -1779,7 +1783,7 @@
           <a:p>
             <a:r>
               <a:rPr lang="en-US" dirty="0"/>
-              <a:t>Activity 2. Look carefully at this diagram: a worked example. Observe every detail before I ask the question.</a:t>
+              <a:t>Activity 2. Look carefully at this diagram: the time zones of the world. Observe every detail before I ask the question.</a:t>
             </a:r>
             <a:endParaRPr lang="en-US" dirty="0"/>
           </a:p>
@@ -1867,7 +1871,7 @@
           <a:p>
             <a:r>
               <a:rPr lang="en-US" dirty="0"/>
-              <a:t>Here is the question for Activity 2: It is 12:00 in Garoua (13° E). What time is it at 43° E? Take one minute to think and write your answer in your rough notebook.</a:t>
+              <a:t>Here is the question for Activity 2: It is 22:00 on Friday in Garoua (GMT + 1). What time is it in Tokyo (GMT + 9)? Take one minute to think and write your answer in your rough notebook.</a:t>
             </a:r>
             <a:endParaRPr lang="en-US" dirty="0"/>
           </a:p>
@@ -1955,7 +1959,7 @@
           <a:p>
             <a:r>
               <a:rPr lang="en-US" dirty="0"/>
-              <a:t>Let us check the answer together. 14:00. The difference is 30°, which is 2 hours, and we add.</a:t>
+              <a:t>Let us check the answer together. 06:00 on Saturday.</a:t>
             </a:r>
             <a:endParaRPr lang="en-US" dirty="0"/>
           </a:p>
@@ -2131,7 +2135,7 @@
           <a:p>
             <a:r>
               <a:rPr lang="en-US" dirty="0"/>
-              <a:t>Here is the question for Activity 3: It is 10:00 on Sunday west of the Date Line. What day is it just east of the line? Take one minute to think and write your answer in your rough notebook.</a:t>
+              <a:t>Here is the question for Activity 3: It is 10:00 on Sunday just west of the Date Line. What is the day just east of the line? Take one minute to think and write your answer in your rough notebook.</a:t>
             </a:r>
             <a:endParaRPr lang="en-US" dirty="0"/>
           </a:p>
@@ -2219,7 +2223,7 @@
           <a:p>
             <a:r>
               <a:rPr lang="en-US" dirty="0"/>
-              <a:t>Let us check the answer together. Saturday, 10:00: we remove one day.</a:t>
+              <a:t>Let us check the answer together. Saturday, at 10:00: we remove one day.</a:t>
             </a:r>
             <a:endParaRPr lang="en-US" dirty="0"/>
           </a:p>
@@ -2571,7 +2575,7 @@
           <a:p>
             <a:r>
               <a:rPr lang="en-US" dirty="0"/>
-              <a:t>Let us copy The Rules. Time and date are calculated with the following rules. On this slide we have Rule 1 and Rule 2. Write each point on a new line, with the key term first, and explain it in your own words when we revise. When you finish, we go to the next slide.</a:t>
+              <a:t>Let us copy Local Time from Longitude. Local time is calculated from longitude with the following rules. Copy the point on Difference of longitude on the left, then draw the diagram on the right: calculating sun time. Give it a title and label it clearly.</a:t>
             </a:r>
             <a:endParaRPr lang="en-US" dirty="0"/>
           </a:p>
@@ -2659,7 +2663,7 @@
           <a:p>
             <a:r>
               <a:rPr lang="en-US" dirty="0"/>
-              <a:t>We continue with The Rules. On this slide we have Rule 3 and Rule 4. Write each point on a new line, with the key term first, and explain it in your own words when we revise.</a:t>
+              <a:t>We continue with Local Time from Longitude. On this slide we have Time difference and East or west. Write each point on a new line, with the key term first, and explain it in your own words when we revise. When you finish, we go to the next slide.</a:t>
             </a:r>
             <a:endParaRPr lang="en-US" dirty="0"/>
           </a:p>
@@ -2747,7 +2751,7 @@
           <a:p>
             <a:r>
               <a:rPr lang="en-US" dirty="0"/>
-              <a:t>Let us copy Worked Example. The time at 43° E when it is 12:00 in Garoua (13° E) is found as follows. On this slide we have Difference and Time. Write each point on a new line, with the key term first, and explain it in your own words when we revise. When you finish, we go to the next slide.</a:t>
+              <a:t>We continue with Local Time from Longitude. On this slide we have Example. Write each point on a new line, with the key term first, and explain it in your own words when we revise.</a:t>
             </a:r>
             <a:endParaRPr lang="en-US" dirty="0"/>
           </a:p>
@@ -2835,7 +2839,7 @@
           <a:p>
             <a:r>
               <a:rPr lang="en-US" dirty="0"/>
-              <a:t>We continue with Worked Example. On this slide we have Answer. Write each point on a new line, with the key term first, and explain it in your own words when we revise.</a:t>
+              <a:t>Let us copy Longitude from Local Time. Longitude is calculated from local time with the following rules. On this slide we have Time difference and Difference of longitude. Write each point on a new line, with the key term first, and explain it in your own words when we revise. When you finish, we go to the next slide.</a:t>
             </a:r>
             <a:endParaRPr lang="en-US" dirty="0"/>
           </a:p>
@@ -2923,7 +2927,7 @@
           <a:p>
             <a:r>
               <a:rPr lang="en-US" dirty="0"/>
-              <a:t>Now draw this illustration in your notebook: calculating sun time. Give it a title and label it clearly.</a:t>
+              <a:t>We continue with Longitude from Local Time. On this slide we have Direction and Example. Write each point on a new line, with the key term first, and explain it in your own words when we revise.</a:t>
             </a:r>
             <a:endParaRPr lang="en-US" dirty="0"/>
           </a:p>
@@ -3011,7 +3015,7 @@
           <a:p>
             <a:r>
               <a:rPr lang="en-US" dirty="0"/>
-              <a:t>Now let us check what you have understood. Question 1: It is 10:00 at Garoua (13° E). What is the local time at 17° W? Answer in your exercise book.</a:t>
+              <a:t>Let us copy Standard Time from Standard Time Zones. Standard time is calculated with time zones as follows. Copy the point on Reading the zones on the left, then draw the diagram on the right: the time zones of the world. Give it a title and label it clearly.</a:t>
             </a:r>
             <a:endParaRPr lang="en-US" dirty="0"/>
           </a:p>
@@ -3099,7 +3103,7 @@
           <a:p>
             <a:r>
               <a:rPr lang="en-US" dirty="0"/>
-              <a:t>The expected answer is: 08:00 (30° = 2 hours, we remove). If you got it right, well done.</a:t>
+              <a:t>We continue with Standard Time from Standard Time Zones. On this slide we have Time difference and Example. Write each point on a new line, with the key term first, and explain it in your own words when we revise.</a:t>
             </a:r>
             <a:endParaRPr lang="en-US" dirty="0"/>
           </a:p>
@@ -3187,7 +3191,7 @@
           <a:p>
             <a:r>
               <a:rPr lang="en-US" dirty="0"/>
-              <a:t>Now let us check what you have understood. Question 2: It is 22:00 on Friday in Garoua (GMT + 1). What time is it in Tokyo (GMT + 9)? Answer in your exercise book.</a:t>
+              <a:t>Let us copy Time and Date across the International Date Line. The date is calculated across the Date Line as follows. Copy the point on Crossing westwards on the left, then draw the diagram on the right: the International Date Line. Give it a title and label it clearly.</a:t>
             </a:r>
             <a:endParaRPr lang="en-US" dirty="0"/>
           </a:p>
@@ -3275,7 +3279,7 @@
           <a:p>
             <a:r>
               <a:rPr lang="en-US" dirty="0"/>
-              <a:t>The expected answer is: 06:00 on Saturday. If you got it right, well done.</a:t>
+              <a:t>We continue with Time and Date across the International Date Line. On this slide we have Crossing eastwards, Passing midnight and Example. Write each point on a new line, with the key term first, and explain it in your own words when we revise.</a:t>
             </a:r>
             <a:endParaRPr lang="en-US" dirty="0"/>
           </a:p>
@@ -3363,7 +3367,7 @@
           <a:p>
             <a:r>
               <a:rPr lang="en-US" dirty="0"/>
-              <a:t>For those who need more practice, fill in the blanks in your exercise book. The answers are: number 1, 4; number 2, remove; number 3, date.</a:t>
+              <a:t>Now let us check what you have understood. Question 1: It is 10:00 at Garoua (13° E). What is the local time at 17° W? Answer in your exercise book.</a:t>
             </a:r>
             <a:endParaRPr lang="en-US" dirty="0"/>
           </a:p>
@@ -3539,7 +3543,7 @@
           <a:p>
             <a:r>
               <a:rPr lang="en-US" dirty="0"/>
-              <a:t>For your homework: Watch the sunrise and the sunset one day this week and write down the times. Write a sentence to explain why the Sun rises in the east. We shall correct it at the beginning of our next lesson.</a:t>
+              <a:t>The expected answer is: 08:00 (30° = 2 hours, we remove). If you got it right, well done.</a:t>
             </a:r>
             <a:endParaRPr lang="en-US" dirty="0"/>
           </a:p>
@@ -3627,7 +3631,7 @@
           <a:p>
             <a:r>
               <a:rPr lang="en-US" dirty="0"/>
-              <a:t>Our next lesson will be on Lesson 5: The Rotation of the Earth. Thank you for your attention, and see you next time.</a:t>
+              <a:t>Now let us check what you have understood. Question 2: It is 22:00 on Friday in Garoua (GMT + 1). What time is it in Tokyo (GMT + 9)? Answer in your exercise book.</a:t>
             </a:r>
             <a:endParaRPr lang="en-US" dirty="0"/>
           </a:p>
@@ -3715,7 +3719,7 @@
           <a:p>
             <a:r>
               <a:rPr lang="en-US" dirty="0"/>
-              <a:t>Let us play the bilingual game. I say a word in English, and you give me the French word. Then we do the reverse.</a:t>
+              <a:t>The expected answer is: 06:00 on Saturday. If you got it right, well done.</a:t>
             </a:r>
             <a:endParaRPr lang="en-US" dirty="0"/>
           </a:p>
@@ -3803,7 +3807,7 @@
           <a:p>
             <a:r>
               <a:rPr lang="en-US" dirty="0"/>
-              <a:t>I record this information in the official logbook of the class after the lesson.</a:t>
+              <a:t>For those who need more practice, fill in the blanks in your exercise book. The answers are: number 1, 4; number 2, remove; number 3, date.</a:t>
             </a:r>
             <a:endParaRPr lang="en-US" dirty="0"/>
           </a:p>
@@ -3891,7 +3895,7 @@
           <a:p>
             <a:r>
               <a:rPr lang="en-US" dirty="0"/>
-              <a:t>I complete the second page of the logbook: the matter taught, the evaluation, the homework and the attendance.</a:t>
+              <a:t>For your homework: Watch the sunrise and the sunset one day this week and write down the times. Write a sentence to explain why the Sun rises in the east. We shall correct it at the beginning of our next lesson.</a:t>
             </a:r>
             <a:endParaRPr lang="en-US" dirty="0"/>
           </a:p>
@@ -3979,7 +3983,7 @@
           <a:p>
             <a:r>
               <a:rPr lang="en-US" dirty="0"/>
-              <a:t>This slide is for me, the teacher: it gives the timing of the lesson and what to do if the projector is not available.</a:t>
+              <a:t>Our next lesson will be on Lesson 5: The Rotation of the Earth. Thank you for your attention, and see you next time.</a:t>
             </a:r>
             <a:endParaRPr lang="en-US" dirty="0"/>
           </a:p>
@@ -4067,7 +4071,7 @@
           <a:p>
             <a:r>
               <a:rPr lang="en-US" dirty="0"/>
-              <a:t>These are the references and picture credits used to prepare this lesson.</a:t>
+              <a:t>Let us play the bilingual game. I say a word in English, and you give me the French word. Then we do the reverse.</a:t>
             </a:r>
             <a:endParaRPr lang="en-US" dirty="0"/>
           </a:p>
@@ -4091,6 +4095,270 @@
             <a:fld id="{F7021451-1387-4CA6-816F-3879F97B5CBC}" type="slidenum">
               <a:rPr lang="en-US"/>
               <a:t>46</a:t>
+            </a:fld>
+            <a:endParaRPr lang="en-US"/>
+          </a:p>
+        </p:txBody>
+      </p:sp>
+    </p:spTree>
+    <p:extLst>
+      <p:ext uri="{BB962C8B-B14F-4D97-AF65-F5344CB8AC3E}">
+        <p14:creationId xmlns:p14="http://schemas.microsoft.com/office/powerpoint/2010/main" val="1024086991"/>
+      </p:ext>
+    </p:extLst>
+  </p:cSld>
+  <p:clrMapOvr>
+    <a:masterClrMapping/>
+  </p:clrMapOvr>
+</p:notes>
+</file>
+
+<file path=ppt/notesSlides/notesSlide47.xml><?xml version="1.0" encoding="utf-8"?>
+<p:notes xmlns:a="http://schemas.openxmlformats.org/drawingml/2006/main" xmlns:r="http://schemas.openxmlformats.org/officeDocument/2006/relationships" xmlns:p="http://schemas.openxmlformats.org/presentationml/2006/main">
+  <p:cSld>
+    <p:spTree>
+      <p:nvGrpSpPr>
+        <p:cNvPr id="1" name=""/>
+        <p:cNvGrpSpPr/>
+        <p:nvPr/>
+      </p:nvGrpSpPr>
+      <p:grpSpPr>
+        <a:xfrm>
+          <a:off x="0" y="0"/>
+          <a:ext cx="0" cy="0"/>
+          <a:chOff x="0" y="0"/>
+          <a:chExt cx="0" cy="0"/>
+        </a:xfrm>
+      </p:grpSpPr>
+      <p:sp>
+        <p:nvSpPr>
+          <p:cNvPr id="2" name="Slide Image Placeholder 1"/>
+          <p:cNvSpPr>
+            <a:spLocks noGrp="1" noRot="1" noChangeAspect="1"/>
+          </p:cNvSpPr>
+          <p:nvPr>
+            <p:ph type="sldImg"/>
+          </p:nvPr>
+        </p:nvSpPr>
+        <p:spPr/>
+      </p:sp>
+      <p:sp>
+        <p:nvSpPr>
+          <p:cNvPr id="3" name="Notes Placeholder 2"/>
+          <p:cNvSpPr>
+            <a:spLocks noGrp="1"/>
+          </p:cNvSpPr>
+          <p:nvPr>
+            <p:ph type="body" idx="1"/>
+          </p:nvPr>
+        </p:nvSpPr>
+        <p:spPr/>
+        <p:txBody>
+          <a:bodyPr/>
+          <a:lstStyle/>
+          <a:p>
+            <a:r>
+              <a:rPr lang="en-US" dirty="0"/>
+              <a:t>I record this information in the official logbook of the class after the lesson.</a:t>
+            </a:r>
+            <a:endParaRPr lang="en-US" dirty="0"/>
+          </a:p>
+        </p:txBody>
+      </p:sp>
+      <p:sp>
+        <p:nvSpPr>
+          <p:cNvPr id="4" name="Slide Number Placeholder 3"/>
+          <p:cNvSpPr>
+            <a:spLocks noGrp="1"/>
+          </p:cNvSpPr>
+          <p:nvPr>
+            <p:ph type="sldNum" sz="quarter" idx="10"/>
+          </p:nvPr>
+        </p:nvSpPr>
+        <p:spPr/>
+        <p:txBody>
+          <a:bodyPr/>
+          <a:lstStyle/>
+          <a:p>
+            <a:fld id="{F7021451-1387-4CA6-816F-3879F97B5CBC}" type="slidenum">
+              <a:rPr lang="en-US"/>
+              <a:t>47</a:t>
+            </a:fld>
+            <a:endParaRPr lang="en-US"/>
+          </a:p>
+        </p:txBody>
+      </p:sp>
+    </p:spTree>
+    <p:extLst>
+      <p:ext uri="{BB962C8B-B14F-4D97-AF65-F5344CB8AC3E}">
+        <p14:creationId xmlns:p14="http://schemas.microsoft.com/office/powerpoint/2010/main" val="1024086991"/>
+      </p:ext>
+    </p:extLst>
+  </p:cSld>
+  <p:clrMapOvr>
+    <a:masterClrMapping/>
+  </p:clrMapOvr>
+</p:notes>
+</file>
+
+<file path=ppt/notesSlides/notesSlide48.xml><?xml version="1.0" encoding="utf-8"?>
+<p:notes xmlns:a="http://schemas.openxmlformats.org/drawingml/2006/main" xmlns:r="http://schemas.openxmlformats.org/officeDocument/2006/relationships" xmlns:p="http://schemas.openxmlformats.org/presentationml/2006/main">
+  <p:cSld>
+    <p:spTree>
+      <p:nvGrpSpPr>
+        <p:cNvPr id="1" name=""/>
+        <p:cNvGrpSpPr/>
+        <p:nvPr/>
+      </p:nvGrpSpPr>
+      <p:grpSpPr>
+        <a:xfrm>
+          <a:off x="0" y="0"/>
+          <a:ext cx="0" cy="0"/>
+          <a:chOff x="0" y="0"/>
+          <a:chExt cx="0" cy="0"/>
+        </a:xfrm>
+      </p:grpSpPr>
+      <p:sp>
+        <p:nvSpPr>
+          <p:cNvPr id="2" name="Slide Image Placeholder 1"/>
+          <p:cNvSpPr>
+            <a:spLocks noGrp="1" noRot="1" noChangeAspect="1"/>
+          </p:cNvSpPr>
+          <p:nvPr>
+            <p:ph type="sldImg"/>
+          </p:nvPr>
+        </p:nvSpPr>
+        <p:spPr/>
+      </p:sp>
+      <p:sp>
+        <p:nvSpPr>
+          <p:cNvPr id="3" name="Notes Placeholder 2"/>
+          <p:cNvSpPr>
+            <a:spLocks noGrp="1"/>
+          </p:cNvSpPr>
+          <p:nvPr>
+            <p:ph type="body" idx="1"/>
+          </p:nvPr>
+        </p:nvSpPr>
+        <p:spPr/>
+        <p:txBody>
+          <a:bodyPr/>
+          <a:lstStyle/>
+          <a:p>
+            <a:r>
+              <a:rPr lang="en-US" dirty="0"/>
+              <a:t>I complete the second page of the logbook: the matter taught, the evaluation, the homework and the attendance.</a:t>
+            </a:r>
+            <a:endParaRPr lang="en-US" dirty="0"/>
+          </a:p>
+        </p:txBody>
+      </p:sp>
+      <p:sp>
+        <p:nvSpPr>
+          <p:cNvPr id="4" name="Slide Number Placeholder 3"/>
+          <p:cNvSpPr>
+            <a:spLocks noGrp="1"/>
+          </p:cNvSpPr>
+          <p:nvPr>
+            <p:ph type="sldNum" sz="quarter" idx="10"/>
+          </p:nvPr>
+        </p:nvSpPr>
+        <p:spPr/>
+        <p:txBody>
+          <a:bodyPr/>
+          <a:lstStyle/>
+          <a:p>
+            <a:fld id="{F7021451-1387-4CA6-816F-3879F97B5CBC}" type="slidenum">
+              <a:rPr lang="en-US"/>
+              <a:t>48</a:t>
+            </a:fld>
+            <a:endParaRPr lang="en-US"/>
+          </a:p>
+        </p:txBody>
+      </p:sp>
+    </p:spTree>
+    <p:extLst>
+      <p:ext uri="{BB962C8B-B14F-4D97-AF65-F5344CB8AC3E}">
+        <p14:creationId xmlns:p14="http://schemas.microsoft.com/office/powerpoint/2010/main" val="1024086991"/>
+      </p:ext>
+    </p:extLst>
+  </p:cSld>
+  <p:clrMapOvr>
+    <a:masterClrMapping/>
+  </p:clrMapOvr>
+</p:notes>
+</file>
+
+<file path=ppt/notesSlides/notesSlide49.xml><?xml version="1.0" encoding="utf-8"?>
+<p:notes xmlns:a="http://schemas.openxmlformats.org/drawingml/2006/main" xmlns:r="http://schemas.openxmlformats.org/officeDocument/2006/relationships" xmlns:p="http://schemas.openxmlformats.org/presentationml/2006/main">
+  <p:cSld>
+    <p:spTree>
+      <p:nvGrpSpPr>
+        <p:cNvPr id="1" name=""/>
+        <p:cNvGrpSpPr/>
+        <p:nvPr/>
+      </p:nvGrpSpPr>
+      <p:grpSpPr>
+        <a:xfrm>
+          <a:off x="0" y="0"/>
+          <a:ext cx="0" cy="0"/>
+          <a:chOff x="0" y="0"/>
+          <a:chExt cx="0" cy="0"/>
+        </a:xfrm>
+      </p:grpSpPr>
+      <p:sp>
+        <p:nvSpPr>
+          <p:cNvPr id="2" name="Slide Image Placeholder 1"/>
+          <p:cNvSpPr>
+            <a:spLocks noGrp="1" noRot="1" noChangeAspect="1"/>
+          </p:cNvSpPr>
+          <p:nvPr>
+            <p:ph type="sldImg"/>
+          </p:nvPr>
+        </p:nvSpPr>
+        <p:spPr/>
+      </p:sp>
+      <p:sp>
+        <p:nvSpPr>
+          <p:cNvPr id="3" name="Notes Placeholder 2"/>
+          <p:cNvSpPr>
+            <a:spLocks noGrp="1"/>
+          </p:cNvSpPr>
+          <p:nvPr>
+            <p:ph type="body" idx="1"/>
+          </p:nvPr>
+        </p:nvSpPr>
+        <p:spPr/>
+        <p:txBody>
+          <a:bodyPr/>
+          <a:lstStyle/>
+          <a:p>
+            <a:r>
+              <a:rPr lang="en-US" dirty="0"/>
+              <a:t>This slide is for me, the teacher: it gives the timing of the lesson and what to do if the projector is not available.</a:t>
+            </a:r>
+            <a:endParaRPr lang="en-US" dirty="0"/>
+          </a:p>
+        </p:txBody>
+      </p:sp>
+      <p:sp>
+        <p:nvSpPr>
+          <p:cNvPr id="4" name="Slide Number Placeholder 3"/>
+          <p:cNvSpPr>
+            <a:spLocks noGrp="1"/>
+          </p:cNvSpPr>
+          <p:nvPr>
+            <p:ph type="sldNum" sz="quarter" idx="10"/>
+          </p:nvPr>
+        </p:nvSpPr>
+        <p:spPr/>
+        <p:txBody>
+          <a:bodyPr/>
+          <a:lstStyle/>
+          <a:p>
+            <a:fld id="{F7021451-1387-4CA6-816F-3879F97B5CBC}" type="slidenum">
+              <a:rPr lang="en-US"/>
+              <a:t>49</a:t>
             </a:fld>
             <a:endParaRPr lang="en-US"/>
           </a:p>
@@ -4197,6 +4465,94 @@
 </p:notes>
 </file>
 
+<file path=ppt/notesSlides/notesSlide50.xml><?xml version="1.0" encoding="utf-8"?>
+<p:notes xmlns:a="http://schemas.openxmlformats.org/drawingml/2006/main" xmlns:r="http://schemas.openxmlformats.org/officeDocument/2006/relationships" xmlns:p="http://schemas.openxmlformats.org/presentationml/2006/main">
+  <p:cSld>
+    <p:spTree>
+      <p:nvGrpSpPr>
+        <p:cNvPr id="1" name=""/>
+        <p:cNvGrpSpPr/>
+        <p:nvPr/>
+      </p:nvGrpSpPr>
+      <p:grpSpPr>
+        <a:xfrm>
+          <a:off x="0" y="0"/>
+          <a:ext cx="0" cy="0"/>
+          <a:chOff x="0" y="0"/>
+          <a:chExt cx="0" cy="0"/>
+        </a:xfrm>
+      </p:grpSpPr>
+      <p:sp>
+        <p:nvSpPr>
+          <p:cNvPr id="2" name="Slide Image Placeholder 1"/>
+          <p:cNvSpPr>
+            <a:spLocks noGrp="1" noRot="1" noChangeAspect="1"/>
+          </p:cNvSpPr>
+          <p:nvPr>
+            <p:ph type="sldImg"/>
+          </p:nvPr>
+        </p:nvSpPr>
+        <p:spPr/>
+      </p:sp>
+      <p:sp>
+        <p:nvSpPr>
+          <p:cNvPr id="3" name="Notes Placeholder 2"/>
+          <p:cNvSpPr>
+            <a:spLocks noGrp="1"/>
+          </p:cNvSpPr>
+          <p:nvPr>
+            <p:ph type="body" idx="1"/>
+          </p:nvPr>
+        </p:nvSpPr>
+        <p:spPr/>
+        <p:txBody>
+          <a:bodyPr/>
+          <a:lstStyle/>
+          <a:p>
+            <a:r>
+              <a:rPr lang="en-US" dirty="0"/>
+              <a:t>These are the references and picture credits used to prepare this lesson.</a:t>
+            </a:r>
+            <a:endParaRPr lang="en-US" dirty="0"/>
+          </a:p>
+        </p:txBody>
+      </p:sp>
+      <p:sp>
+        <p:nvSpPr>
+          <p:cNvPr id="4" name="Slide Number Placeholder 3"/>
+          <p:cNvSpPr>
+            <a:spLocks noGrp="1"/>
+          </p:cNvSpPr>
+          <p:nvPr>
+            <p:ph type="sldNum" sz="quarter" idx="10"/>
+          </p:nvPr>
+        </p:nvSpPr>
+        <p:spPr/>
+        <p:txBody>
+          <a:bodyPr/>
+          <a:lstStyle/>
+          <a:p>
+            <a:fld id="{F7021451-1387-4CA6-816F-3879F97B5CBC}" type="slidenum">
+              <a:rPr lang="en-US"/>
+              <a:t>50</a:t>
+            </a:fld>
+            <a:endParaRPr lang="en-US"/>
+          </a:p>
+        </p:txBody>
+      </p:sp>
+    </p:spTree>
+    <p:extLst>
+      <p:ext uri="{BB962C8B-B14F-4D97-AF65-F5344CB8AC3E}">
+        <p14:creationId xmlns:p14="http://schemas.microsoft.com/office/powerpoint/2010/main" val="1024086991"/>
+      </p:ext>
+    </p:extLst>
+  </p:cSld>
+  <p:clrMapOvr>
+    <a:masterClrMapping/>
+  </p:clrMapOvr>
+</p:notes>
+</file>
+
 <file path=ppt/notesSlides/notesSlide6.xml><?xml version="1.0" encoding="utf-8"?>
 <p:notes xmlns:a="http://schemas.openxmlformats.org/drawingml/2006/main" xmlns:r="http://schemas.openxmlformats.org/officeDocument/2006/relationships" xmlns:p="http://schemas.openxmlformats.org/presentationml/2006/main">
   <p:cSld>
@@ -4419,7 +4775,7 @@
           <a:p>
             <a:r>
               <a:rPr lang="en-US" dirty="0"/>
-              <a:t>By the end of this lesson, you should be able to do three things. Number 1: state the three rules for time calculations. Number 2: calculate local time from a difference of longitude, and longitude from local time. Number 3: calculate standard time with time zones. Number 4: find the correct date after crossing midnight or the International Date Line.</a:t>
+              <a:t>By the end of this lesson, you should be able to do four things. Number 1: state the three rules for time calculations. Number 2: calculate local time from a difference of longitude, and longitude from local time. Number 3: calculate standard time with time zones. Number 4: find the correct date after crossing midnight or the International Date Line.</a:t>
             </a:r>
             <a:endParaRPr lang="en-US" dirty="0"/>
           </a:p>
@@ -5887,7 +6243,7 @@
         <p:spPr>
           <a:xfrm>
             <a:off x="0" y="658368"/>
-            <a:ext cx="5120640" cy="5833872"/>
+            <a:ext cx="3840480" cy="5833872"/>
           </a:xfrm>
           <a:prstGeom prst="rect">
             <a:avLst/>
@@ -5902,8 +6258,8 @@
         </p:nvSpPr>
         <p:spPr>
           <a:xfrm>
-            <a:off x="5349240" y="1005840"/>
-            <a:ext cx="6522415" cy="731520"/>
+            <a:off x="4069080" y="1005840"/>
+            <a:ext cx="7802575" cy="731520"/>
           </a:xfrm>
           <a:prstGeom prst="rect">
             <a:avLst/>
@@ -5943,8 +6299,8 @@
         </p:nvSpPr>
         <p:spPr>
           <a:xfrm>
-            <a:off x="5349240" y="1783080"/>
-            <a:ext cx="6522415" cy="4663440"/>
+            <a:off x="4069080" y="1783080"/>
+            <a:ext cx="7802575" cy="4663440"/>
           </a:xfrm>
           <a:prstGeom prst="rect">
             <a:avLst/>
@@ -5971,7 +6327,7 @@
                 <a:ea typeface="Times New Roman" pitchFamily="34" charset="-122"/>
                 <a:cs typeface="Times New Roman" pitchFamily="34" charset="-120"/>
               </a:rPr>
-              <a:t>A World Cup match in Los Angeles starts at 5 p.m. on Sunday, local time (GMT − 7). Moussa and his friends in Garoua want to watch it live. They must calculate the time in Garoua.</a:t>
+              <a:t>A World Cup match in Los Angeles (GMT − 7) starts at 5 p.m. on Sunday, local time. Moussa and his friends in Garoua (GMT + 1) want to watch it live. Moussa asks: "At what time and on what day must we switch on the television?"</a:t>
             </a:r>
             <a:endParaRPr lang="en-US" sz="4000" dirty="0"/>
           </a:p>
@@ -6409,7 +6765,7 @@
                 <a:ea typeface="Times New Roman" pitchFamily="34" charset="-122"/>
                 <a:cs typeface="Times New Roman" pitchFamily="34" charset="-120"/>
               </a:rPr>
-              <a:t>Moussa must find the time of the match in Garoua.</a:t>
+              <a:t>Moussa must calculate the time and the day of the match in Garoua.</a:t>
             </a:r>
             <a:endParaRPr lang="en-US" sz="4000" dirty="0"/>
           </a:p>
@@ -7835,7 +8191,7 @@
                 <a:ea typeface="Calibri" pitchFamily="34" charset="-122"/>
                 <a:cs typeface="Calibri" pitchFamily="34" charset="-120"/>
               </a:rPr>
-              <a:t>1. THE RULES</a:t>
+              <a:t>1. SUN TIME</a:t>
             </a:r>
             <a:endParaRPr lang="en-US" sz="1400" dirty="0"/>
           </a:p>
@@ -7882,7 +8238,7 @@
       </p:sp>
       <p:pic>
         <p:nvPicPr>
-          <p:cNvPr id="4" name="Image 0" descr="/home/claude/f4/img/v2/time_line_big.png">    </p:cNvPr>
+          <p:cNvPr id="4" name="Image 0" descr="/home/claude/f4/img/v2/time_calc_big.png">    </p:cNvPr>
           <p:cNvPicPr>
             <a:picLocks noChangeAspect="1"/>
           </p:cNvPicPr>
@@ -7937,7 +8293,7 @@
                 <a:ea typeface="Times New Roman" pitchFamily="34" charset="-122"/>
                 <a:cs typeface="Times New Roman" pitchFamily="34" charset="-120"/>
               </a:rPr>
-              <a:t>The rules of time.</a:t>
+              <a:t>A worked example.</a:t>
             </a:r>
             <a:endParaRPr lang="en-US" sz="1800" dirty="0"/>
           </a:p>
@@ -8644,7 +9000,7 @@
                 <a:ea typeface="Calibri" pitchFamily="34" charset="-122"/>
                 <a:cs typeface="Calibri" pitchFamily="34" charset="-120"/>
               </a:rPr>
-              <a:t>1. THE RULES</a:t>
+              <a:t>1. SUN TIME</a:t>
             </a:r>
             <a:endParaRPr lang="en-US" sz="1400" dirty="0"/>
           </a:p>
@@ -8751,7 +9107,7 @@
                 <a:ea typeface="Times New Roman" pitchFamily="34" charset="-122"/>
                 <a:cs typeface="Times New Roman" pitchFamily="34" charset="-120"/>
               </a:rPr>
-              <a:t>Going east, do we add or remove time? And going west?</a:t>
+              <a:t>It is 12:00 in Garoua (13° E). What is the local time at 43° E?</a:t>
             </a:r>
             <a:endParaRPr lang="en-US" sz="4000" dirty="0"/>
           </a:p>
@@ -8863,7 +9219,7 @@
                 <a:ea typeface="Calibri" pitchFamily="34" charset="-122"/>
                 <a:cs typeface="Calibri" pitchFamily="34" charset="-120"/>
               </a:rPr>
-              <a:t>1. THE RULES</a:t>
+              <a:t>1. SUN TIME</a:t>
             </a:r>
             <a:endParaRPr lang="en-US" sz="1400" dirty="0"/>
           </a:p>
@@ -8970,7 +9326,7 @@
                 <a:ea typeface="Times New Roman" pitchFamily="34" charset="-122"/>
                 <a:cs typeface="Times New Roman" pitchFamily="34" charset="-120"/>
               </a:rPr>
-              <a:t>East: we add. West: we remove.</a:t>
+              <a:t>14:00: the difference is 30°, which is 2 hours, and we add because the place is to the east.</a:t>
             </a:r>
             <a:endParaRPr lang="en-US" sz="4000" dirty="0"/>
           </a:p>
@@ -9082,7 +9438,7 @@
                 <a:ea typeface="Calibri" pitchFamily="34" charset="-122"/>
                 <a:cs typeface="Calibri" pitchFamily="34" charset="-120"/>
               </a:rPr>
-              <a:t>2. CALCULATING SUN TIME</a:t>
+              <a:t>2. STANDARD TIME</a:t>
             </a:r>
             <a:endParaRPr lang="en-US" sz="1400" dirty="0"/>
           </a:p>
@@ -9129,7 +9485,7 @@
       </p:sp>
       <p:pic>
         <p:nvPicPr>
-          <p:cNvPr id="4" name="Image 0" descr="/home/claude/f4/img/v2/time_calc_big.png">    </p:cNvPr>
+          <p:cNvPr id="4" name="Image 0" descr="/home/claude/f4/img/v2/time_zones_big.png">    </p:cNvPr>
           <p:cNvPicPr>
             <a:picLocks noChangeAspect="1"/>
           </p:cNvPicPr>
@@ -9143,8 +9499,8 @@
         </p:blipFill>
         <p:spPr>
           <a:xfrm>
-            <a:off x="629930" y="1783080"/>
-            <a:ext cx="10931835" cy="4270248"/>
+            <a:off x="1034813" y="1783080"/>
+            <a:ext cx="10122069" cy="4270248"/>
           </a:xfrm>
           <a:prstGeom prst="rect">
             <a:avLst/>
@@ -9184,7 +9540,7 @@
                 <a:ea typeface="Times New Roman" pitchFamily="34" charset="-122"/>
                 <a:cs typeface="Times New Roman" pitchFamily="34" charset="-120"/>
               </a:rPr>
-              <a:t>A worked example.</a:t>
+              <a:t>The time zones of the world.</a:t>
             </a:r>
             <a:endParaRPr lang="en-US" sz="1800" dirty="0"/>
           </a:p>
@@ -9296,7 +9652,7 @@
                 <a:ea typeface="Calibri" pitchFamily="34" charset="-122"/>
                 <a:cs typeface="Calibri" pitchFamily="34" charset="-120"/>
               </a:rPr>
-              <a:t>2. CALCULATING SUN TIME</a:t>
+              <a:t>2. STANDARD TIME</a:t>
             </a:r>
             <a:endParaRPr lang="en-US" sz="1400" dirty="0"/>
           </a:p>
@@ -9403,7 +9759,7 @@
                 <a:ea typeface="Times New Roman" pitchFamily="34" charset="-122"/>
                 <a:cs typeface="Times New Roman" pitchFamily="34" charset="-120"/>
               </a:rPr>
-              <a:t>It is 12:00 in Garoua (13° E). What time is it at 43° E?</a:t>
+              <a:t>It is 22:00 on Friday in Garoua (GMT + 1). What time is it in Tokyo (GMT + 9)?</a:t>
             </a:r>
             <a:endParaRPr lang="en-US" sz="4000" dirty="0"/>
           </a:p>
@@ -9515,7 +9871,7 @@
                 <a:ea typeface="Calibri" pitchFamily="34" charset="-122"/>
                 <a:cs typeface="Calibri" pitchFamily="34" charset="-120"/>
               </a:rPr>
-              <a:t>2. CALCULATING SUN TIME</a:t>
+              <a:t>2. STANDARD TIME</a:t>
             </a:r>
             <a:endParaRPr lang="en-US" sz="1400" dirty="0"/>
           </a:p>
@@ -9622,7 +9978,7 @@
                 <a:ea typeface="Times New Roman" pitchFamily="34" charset="-122"/>
                 <a:cs typeface="Times New Roman" pitchFamily="34" charset="-120"/>
               </a:rPr>
-              <a:t>14:00. The difference is 30°, which is 2 hours, and we add.</a:t>
+              <a:t>06:00 on Saturday.</a:t>
             </a:r>
             <a:endParaRPr lang="en-US" sz="4000" dirty="0"/>
           </a:p>
@@ -9734,7 +10090,7 @@
                 <a:ea typeface="Calibri" pitchFamily="34" charset="-122"/>
                 <a:cs typeface="Calibri" pitchFamily="34" charset="-120"/>
               </a:rPr>
-              <a:t>3. CALCULATING THE DATE</a:t>
+              <a:t>3. THE DATE LINE</a:t>
             </a:r>
             <a:endParaRPr lang="en-US" sz="1400" dirty="0"/>
           </a:p>
@@ -9948,7 +10304,7 @@
                 <a:ea typeface="Calibri" pitchFamily="34" charset="-122"/>
                 <a:cs typeface="Calibri" pitchFamily="34" charset="-120"/>
               </a:rPr>
-              <a:t>3. CALCULATING THE DATE</a:t>
+              <a:t>3. THE DATE LINE</a:t>
             </a:r>
             <a:endParaRPr lang="en-US" sz="1400" dirty="0"/>
           </a:p>
@@ -10055,7 +10411,7 @@
                 <a:ea typeface="Times New Roman" pitchFamily="34" charset="-122"/>
                 <a:cs typeface="Times New Roman" pitchFamily="34" charset="-120"/>
               </a:rPr>
-              <a:t>It is 10:00 on Sunday west of the Date Line. What day is it just east of the line?</a:t>
+              <a:t>It is 10:00 on Sunday just west of the Date Line. What is the day just east of the line?</a:t>
             </a:r>
             <a:endParaRPr lang="en-US" sz="4000" dirty="0"/>
           </a:p>
@@ -10167,7 +10523,7 @@
                 <a:ea typeface="Calibri" pitchFamily="34" charset="-122"/>
                 <a:cs typeface="Calibri" pitchFamily="34" charset="-120"/>
               </a:rPr>
-              <a:t>3. CALCULATING THE DATE</a:t>
+              <a:t>3. THE DATE LINE</a:t>
             </a:r>
             <a:endParaRPr lang="en-US" sz="1400" dirty="0"/>
           </a:p>
@@ -10274,7 +10630,7 @@
                 <a:ea typeface="Times New Roman" pitchFamily="34" charset="-122"/>
                 <a:cs typeface="Times New Roman" pitchFamily="34" charset="-120"/>
               </a:rPr>
-              <a:t>Saturday, 10:00: we remove one day.</a:t>
+              <a:t>Saturday, at 10:00: we remove one day.</a:t>
             </a:r>
             <a:endParaRPr lang="en-US" sz="4000" dirty="0"/>
           </a:p>
@@ -10668,7 +11024,7 @@
         <p:spPr>
           <a:xfrm>
             <a:off x="0" y="658368"/>
-            <a:ext cx="5120640" cy="5833872"/>
+            <a:ext cx="3840480" cy="5833872"/>
           </a:xfrm>
           <a:prstGeom prst="rect">
             <a:avLst/>
@@ -10683,8 +11039,8 @@
         </p:nvSpPr>
         <p:spPr>
           <a:xfrm>
-            <a:off x="5349240" y="1005840"/>
-            <a:ext cx="6522415" cy="731520"/>
+            <a:off x="4069080" y="1005840"/>
+            <a:ext cx="7802575" cy="731520"/>
           </a:xfrm>
           <a:prstGeom prst="rect">
             <a:avLst/>
@@ -10724,8 +11080,8 @@
         </p:nvSpPr>
         <p:spPr>
           <a:xfrm>
-            <a:off x="5349240" y="1783080"/>
-            <a:ext cx="6522415" cy="4663440"/>
+            <a:off x="4069080" y="1783080"/>
+            <a:ext cx="7802575" cy="4663440"/>
           </a:xfrm>
           <a:prstGeom prst="rect">
             <a:avLst/>
@@ -10789,7 +11145,7 @@
                 <a:ea typeface="Times New Roman" pitchFamily="34" charset="-122"/>
                 <a:cs typeface="Times New Roman" pitchFamily="34" charset="-120"/>
               </a:rPr>
-              <a:t>It is the number of degrees between two places.</a:t>
+              <a:t>It is the number of degrees between the meridians of two places.</a:t>
             </a:r>
             <a:endParaRPr lang="en-US" sz="4000" dirty="0"/>
           </a:p>
@@ -11953,9 +12309,170 @@
           </a:p>
         </p:txBody>
       </p:sp>
+      <p:sp>
+        <p:nvSpPr>
+          <p:cNvPr id="3" name="Text 1"/>
+          <p:cNvSpPr/>
+          <p:nvPr/>
+        </p:nvSpPr>
+        <p:spPr>
+          <a:xfrm>
+            <a:off x="365760" y="1005840"/>
+            <a:ext cx="11460175" cy="731520"/>
+          </a:xfrm>
+          <a:prstGeom prst="rect">
+            <a:avLst/>
+          </a:prstGeom>
+          <a:noFill/>
+          <a:ln/>
+        </p:spPr>
+        <p:txBody>
+          <a:bodyPr wrap="square" lIns="0" tIns="0" rIns="0" bIns="0" rtlCol="0" anchor="ctr">
+            <a:normAutofit/>
+          </a:bodyPr>
+          <a:lstStyle/>
+          <a:p>
+            <a:pPr algn="ctr" indent="0" marL="0">
+              <a:buNone/>
+            </a:pPr>
+            <a:r>
+              <a:rPr lang="en-US" sz="3600" b="1" dirty="0">
+                <a:solidFill>
+                  <a:srgbClr val="990011"/>
+                </a:solidFill>
+                <a:latin typeface="Times New Roman" pitchFamily="34" charset="0"/>
+                <a:ea typeface="Times New Roman" pitchFamily="34" charset="-122"/>
+                <a:cs typeface="Times New Roman" pitchFamily="34" charset="-120"/>
+              </a:rPr>
+              <a:t>1. Sun Time (Local Time)</a:t>
+            </a:r>
+            <a:endParaRPr lang="en-US" sz="3600" dirty="0"/>
+          </a:p>
+        </p:txBody>
+      </p:sp>
+      <p:sp>
+        <p:nvSpPr>
+          <p:cNvPr id="4" name="Text 2"/>
+          <p:cNvSpPr/>
+          <p:nvPr/>
+        </p:nvSpPr>
+        <p:spPr>
+          <a:xfrm>
+            <a:off x="365760" y="1737360"/>
+            <a:ext cx="5120640" cy="457200"/>
+          </a:xfrm>
+          <a:prstGeom prst="rect">
+            <a:avLst/>
+          </a:prstGeom>
+          <a:noFill/>
+          <a:ln/>
+        </p:spPr>
+        <p:txBody>
+          <a:bodyPr wrap="square" lIns="0" tIns="0" rIns="0" bIns="0" rtlCol="0" anchor="ctr">
+            <a:normAutofit/>
+          </a:bodyPr>
+          <a:lstStyle/>
+          <a:p>
+            <a:pPr algn="l" indent="0" marL="0">
+              <a:buNone/>
+            </a:pPr>
+            <a:r>
+              <a:rPr lang="en-US" sz="3000" b="1" dirty="0">
+                <a:solidFill>
+                  <a:srgbClr val="990011"/>
+                </a:solidFill>
+                <a:latin typeface="Times New Roman" pitchFamily="34" charset="0"/>
+                <a:ea typeface="Times New Roman" pitchFamily="34" charset="-122"/>
+                <a:cs typeface="Times New Roman" pitchFamily="34" charset="-120"/>
+              </a:rPr>
+              <a:t>A) Local Time from Longitude</a:t>
+            </a:r>
+            <a:endParaRPr lang="en-US" sz="3000" dirty="0"/>
+          </a:p>
+        </p:txBody>
+      </p:sp>
+      <p:sp>
+        <p:nvSpPr>
+          <p:cNvPr id="5" name="Text 3"/>
+          <p:cNvSpPr/>
+          <p:nvPr/>
+        </p:nvSpPr>
+        <p:spPr>
+          <a:xfrm>
+            <a:off x="365760" y="2240280"/>
+            <a:ext cx="4846320" cy="4160520"/>
+          </a:xfrm>
+          <a:prstGeom prst="rect">
+            <a:avLst/>
+          </a:prstGeom>
+          <a:noFill/>
+          <a:ln/>
+        </p:spPr>
+        <p:txBody>
+          <a:bodyPr wrap="square" lIns="0" tIns="0" rIns="0" bIns="0" rtlCol="0" anchor="t"/>
+          <a:lstStyle/>
+          <a:p>
+            <a:pPr algn="l" indent="0" marL="0">
+              <a:spcAft>
+                <a:spcPts val="800"/>
+              </a:spcAft>
+              <a:buNone/>
+            </a:pPr>
+            <a:r>
+              <a:rPr lang="en-US" sz="3200" i="1" dirty="0">
+                <a:solidFill>
+                  <a:srgbClr val="111111"/>
+                </a:solidFill>
+                <a:latin typeface="Times New Roman" pitchFamily="34" charset="0"/>
+                <a:ea typeface="Times New Roman" pitchFamily="34" charset="-122"/>
+                <a:cs typeface="Times New Roman" pitchFamily="34" charset="-120"/>
+              </a:rPr>
+              <a:t>Local time is calculated from longitude with the following rules:</a:t>
+            </a:r>
+            <a:endParaRPr lang="en-US" sz="3200" dirty="0"/>
+          </a:p>
+          <a:p>
+            <a:pPr algn="l" indent="0" marL="0">
+              <a:spcAft>
+                <a:spcPts val="800"/>
+              </a:spcAft>
+              <a:buNone/>
+            </a:pPr>
+            <a:r>
+              <a:rPr lang="en-US" sz="3200" b="1" dirty="0">
+                <a:solidFill>
+                  <a:srgbClr val="111111"/>
+                </a:solidFill>
+                <a:latin typeface="Times New Roman" pitchFamily="34" charset="0"/>
+                <a:ea typeface="Times New Roman" pitchFamily="34" charset="-122"/>
+                <a:cs typeface="Times New Roman" pitchFamily="34" charset="-120"/>
+              </a:rPr>
+              <a:t>Difference of longitude: </a:t>
+            </a:r>
+            <a:pPr algn="l" indent="0" marL="0">
+              <a:spcAft>
+                <a:spcPts val="800"/>
+              </a:spcAft>
+              <a:buNone/>
+            </a:pPr>
+            <a:r>
+              <a:rPr lang="en-US" sz="3200" dirty="0">
+                <a:solidFill>
+                  <a:srgbClr val="111111"/>
+                </a:solidFill>
+                <a:latin typeface="Times New Roman" pitchFamily="34" charset="0"/>
+                <a:ea typeface="Times New Roman" pitchFamily="34" charset="-122"/>
+                <a:cs typeface="Times New Roman" pitchFamily="34" charset="-120"/>
+              </a:rPr>
+              <a:t>If both places are on the same side of Greenwich, we subtract; if not, we add.</a:t>
+            </a:r>
+            <a:endParaRPr lang="en-US" sz="3200" dirty="0"/>
+          </a:p>
+        </p:txBody>
+      </p:sp>
       <p:pic>
         <p:nvPicPr>
-          <p:cNvPr id="3" name="Image 0" descr="/home/claude/f4/img/minesec_sheet.png">    </p:cNvPr>
+          <p:cNvPr id="6" name="Image 0" descr="/home/claude/f4/img/v2/time_calc_big.png">    </p:cNvPr>
           <p:cNvPicPr>
             <a:picLocks noChangeAspect="1"/>
           </p:cNvPicPr>
@@ -11969,8 +12486,8 @@
         </p:blipFill>
         <p:spPr>
           <a:xfrm>
-            <a:off x="0" y="658368"/>
-            <a:ext cx="2468880" cy="5833872"/>
+            <a:off x="5349240" y="2617506"/>
+            <a:ext cx="6659575" cy="2601397"/>
           </a:xfrm>
           <a:prstGeom prst="rect">
             <a:avLst/>
@@ -11979,14 +12496,14 @@
       </p:pic>
       <p:sp>
         <p:nvSpPr>
-          <p:cNvPr id="4" name="Text 1"/>
+          <p:cNvPr id="7" name="Text 4"/>
           <p:cNvSpPr/>
           <p:nvPr/>
         </p:nvSpPr>
         <p:spPr>
           <a:xfrm>
-            <a:off x="2697480" y="1005840"/>
-            <a:ext cx="9174175" cy="731520"/>
+            <a:off x="5349240" y="6089904"/>
+            <a:ext cx="6659575" cy="347472"/>
           </a:xfrm>
           <a:prstGeom prst="rect">
             <a:avLst/>
@@ -11995,142 +12512,24 @@
           <a:ln/>
         </p:spPr>
         <p:txBody>
-          <a:bodyPr wrap="square" lIns="0" tIns="0" rIns="0" bIns="0" rtlCol="0" anchor="ctr">
-            <a:normAutofit/>
-          </a:bodyPr>
+          <a:bodyPr wrap="square" lIns="0" tIns="0" rIns="0" bIns="0" rtlCol="0" anchor="ctr"/>
           <a:lstStyle/>
           <a:p>
             <a:pPr algn="ctr" indent="0" marL="0">
               <a:buNone/>
             </a:pPr>
             <a:r>
-              <a:rPr lang="en-US" sz="3600" b="1" dirty="0">
-                <a:solidFill>
-                  <a:srgbClr val="990011"/>
+              <a:rPr lang="en-US" sz="1600" i="1" dirty="0">
+                <a:solidFill>
+                  <a:srgbClr val="555555"/>
                 </a:solidFill>
                 <a:latin typeface="Times New Roman" pitchFamily="34" charset="0"/>
                 <a:ea typeface="Times New Roman" pitchFamily="34" charset="-122"/>
                 <a:cs typeface="Times New Roman" pitchFamily="34" charset="-120"/>
               </a:rPr>
-              <a:t>1. The Rules</a:t>
-            </a:r>
-            <a:endParaRPr lang="en-US" sz="3600" dirty="0"/>
-          </a:p>
-        </p:txBody>
-      </p:sp>
-      <p:sp>
-        <p:nvSpPr>
-          <p:cNvPr id="5" name="Text 2"/>
-          <p:cNvSpPr/>
-          <p:nvPr/>
-        </p:nvSpPr>
-        <p:spPr>
-          <a:xfrm>
-            <a:off x="2697480" y="1783080"/>
-            <a:ext cx="9174175" cy="4663440"/>
-          </a:xfrm>
-          <a:prstGeom prst="rect">
-            <a:avLst/>
-          </a:prstGeom>
-          <a:noFill/>
-          <a:ln/>
-        </p:spPr>
-        <p:txBody>
-          <a:bodyPr wrap="square" lIns="0" tIns="0" rIns="0" bIns="0" rtlCol="0" anchor="t"/>
-          <a:lstStyle/>
-          <a:p>
-            <a:pPr algn="l" indent="0" marL="0">
-              <a:spcAft>
-                <a:spcPts val="800"/>
-              </a:spcAft>
-              <a:buNone/>
-            </a:pPr>
-            <a:r>
-              <a:rPr lang="en-US" sz="4000" i="1" dirty="0">
-                <a:solidFill>
-                  <a:srgbClr val="111111"/>
-                </a:solidFill>
-                <a:latin typeface="Times New Roman" pitchFamily="34" charset="0"/>
-                <a:ea typeface="Times New Roman" pitchFamily="34" charset="-122"/>
-                <a:cs typeface="Times New Roman" pitchFamily="34" charset="-120"/>
-              </a:rPr>
-              <a:t>Time and date are calculated with the following rules:</a:t>
-            </a:r>
-            <a:endParaRPr lang="en-US" sz="4000" dirty="0"/>
-          </a:p>
-          <a:p>
-            <a:pPr algn="l" indent="0" marL="0">
-              <a:spcAft>
-                <a:spcPts val="800"/>
-              </a:spcAft>
-              <a:buNone/>
-            </a:pPr>
-            <a:r>
-              <a:rPr lang="en-US" sz="4000" b="1" dirty="0">
-                <a:solidFill>
-                  <a:srgbClr val="111111"/>
-                </a:solidFill>
-                <a:latin typeface="Times New Roman" pitchFamily="34" charset="0"/>
-                <a:ea typeface="Times New Roman" pitchFamily="34" charset="-122"/>
-                <a:cs typeface="Times New Roman" pitchFamily="34" charset="-120"/>
-              </a:rPr>
-              <a:t>Rule 1: </a:t>
-            </a:r>
-            <a:pPr algn="l" indent="0" marL="0">
-              <a:spcAft>
-                <a:spcPts val="800"/>
-              </a:spcAft>
-              <a:buNone/>
-            </a:pPr>
-            <a:r>
-              <a:rPr lang="en-US" sz="4000" dirty="0">
-                <a:solidFill>
-                  <a:srgbClr val="111111"/>
-                </a:solidFill>
-                <a:latin typeface="Times New Roman" pitchFamily="34" charset="0"/>
-                <a:ea typeface="Times New Roman" pitchFamily="34" charset="-122"/>
-                <a:cs typeface="Times New Roman" pitchFamily="34" charset="-120"/>
-              </a:rPr>
-              <a:t>We find the difference of longitude and multiply it by 4 minutes.</a:t>
-            </a:r>
-            <a:endParaRPr lang="en-US" sz="4000" dirty="0"/>
-          </a:p>
-          <a:p>
-            <a:pPr algn="l" indent="0" marL="0">
-              <a:spcAft>
-                <a:spcPts val="800"/>
-              </a:spcAft>
-              <a:buNone/>
-            </a:pPr>
-            <a:r>
-              <a:rPr lang="en-US" sz="4000" b="1" dirty="0">
-                <a:solidFill>
-                  <a:srgbClr val="111111"/>
-                </a:solidFill>
-                <a:latin typeface="Times New Roman" pitchFamily="34" charset="0"/>
-                <a:ea typeface="Times New Roman" pitchFamily="34" charset="-122"/>
-                <a:cs typeface="Times New Roman" pitchFamily="34" charset="-120"/>
-              </a:rPr>
-              <a:t>Rule 2: </a:t>
-            </a:r>
-            <a:pPr algn="l" indent="0" marL="0">
-              <a:spcAft>
-                <a:spcPts val="800"/>
-              </a:spcAft>
-              <a:buNone/>
-            </a:pPr>
-            <a:r>
-              <a:rPr lang="en-US" sz="4000" dirty="0">
-                <a:solidFill>
-                  <a:srgbClr val="111111"/>
-                </a:solidFill>
-                <a:latin typeface="Times New Roman" pitchFamily="34" charset="0"/>
-                <a:ea typeface="Times New Roman" pitchFamily="34" charset="-122"/>
-                <a:cs typeface="Times New Roman" pitchFamily="34" charset="-120"/>
-              </a:rPr>
-              <a:t>We add the time difference for a place to the east and remove it for a place to the west.</a:t>
-            </a:r>
-            <a:endParaRPr lang="en-US" sz="4000" dirty="0"/>
+              <a:t>Illustration: calculating sun time</a:t>
+            </a:r>
+            <a:endParaRPr lang="en-US" sz="1600" dirty="0"/>
           </a:p>
         </p:txBody>
       </p:sp>
@@ -12263,7 +12662,7 @@
         <p:spPr>
           <a:xfrm>
             <a:off x="0" y="658368"/>
-            <a:ext cx="5120640" cy="5833872"/>
+            <a:ext cx="2468880" cy="5833872"/>
           </a:xfrm>
           <a:prstGeom prst="rect">
             <a:avLst/>
@@ -12278,8 +12677,8 @@
         </p:nvSpPr>
         <p:spPr>
           <a:xfrm>
-            <a:off x="5349240" y="1005840"/>
-            <a:ext cx="6522415" cy="731520"/>
+            <a:off x="2697480" y="1005840"/>
+            <a:ext cx="9174175" cy="731520"/>
           </a:xfrm>
           <a:prstGeom prst="rect">
             <a:avLst/>
@@ -12305,7 +12704,7 @@
                 <a:ea typeface="Times New Roman" pitchFamily="34" charset="-122"/>
                 <a:cs typeface="Times New Roman" pitchFamily="34" charset="-120"/>
               </a:rPr>
-              <a:t>1. The Rules (continued)</a:t>
+              <a:t>1. Sun Time (Local Time)</a:t>
             </a:r>
             <a:endParaRPr lang="en-US" sz="3600" dirty="0"/>
           </a:p>
@@ -12319,8 +12718,47 @@
         </p:nvSpPr>
         <p:spPr>
           <a:xfrm>
-            <a:off x="5349240" y="1783080"/>
-            <a:ext cx="6522415" cy="4663440"/>
+            <a:off x="2697480" y="1737360"/>
+            <a:ext cx="9174175" cy="457200"/>
+          </a:xfrm>
+          <a:prstGeom prst="rect">
+            <a:avLst/>
+          </a:prstGeom>
+          <a:noFill/>
+          <a:ln/>
+        </p:spPr>
+        <p:txBody>
+          <a:bodyPr wrap="square" lIns="0" tIns="0" rIns="0" bIns="0" rtlCol="0" anchor="ctr"/>
+          <a:lstStyle/>
+          <a:p>
+            <a:pPr algn="l" indent="0" marL="0">
+              <a:buNone/>
+            </a:pPr>
+            <a:r>
+              <a:rPr lang="en-US" sz="3200" b="1" dirty="0">
+                <a:solidFill>
+                  <a:srgbClr val="990011"/>
+                </a:solidFill>
+                <a:latin typeface="Times New Roman" pitchFamily="34" charset="0"/>
+                <a:ea typeface="Times New Roman" pitchFamily="34" charset="-122"/>
+                <a:cs typeface="Times New Roman" pitchFamily="34" charset="-120"/>
+              </a:rPr>
+              <a:t>A) Local Time from Longitude</a:t>
+            </a:r>
+            <a:endParaRPr lang="en-US" sz="3200" dirty="0"/>
+          </a:p>
+        </p:txBody>
+      </p:sp>
+      <p:sp>
+        <p:nvSpPr>
+          <p:cNvPr id="6" name="Text 3"/>
+          <p:cNvSpPr/>
+          <p:nvPr/>
+        </p:nvSpPr>
+        <p:spPr>
+          <a:xfrm>
+            <a:off x="2697480" y="2240280"/>
+            <a:ext cx="9174175" cy="4206240"/>
           </a:xfrm>
           <a:prstGeom prst="rect">
             <a:avLst/>
@@ -12347,7 +12785,7 @@
                 <a:ea typeface="Times New Roman" pitchFamily="34" charset="-122"/>
                 <a:cs typeface="Times New Roman" pitchFamily="34" charset="-120"/>
               </a:rPr>
-              <a:t>Rule 3: </a:t>
+              <a:t>Time difference: </a:t>
             </a:r>
             <a:pPr algn="l" indent="0" marL="0">
               <a:spcAft>
@@ -12364,7 +12802,7 @@
                 <a:ea typeface="Times New Roman" pitchFamily="34" charset="-122"/>
                 <a:cs typeface="Times New Roman" pitchFamily="34" charset="-120"/>
               </a:rPr>
-              <a:t>When the time passes midnight, the date changes.</a:t>
+              <a:t>We multiply the difference of longitude by 4 minutes.</a:t>
             </a:r>
             <a:endParaRPr lang="en-US" sz="4000" dirty="0"/>
           </a:p>
@@ -12384,7 +12822,7 @@
                 <a:ea typeface="Times New Roman" pitchFamily="34" charset="-122"/>
                 <a:cs typeface="Times New Roman" pitchFamily="34" charset="-120"/>
               </a:rPr>
-              <a:t>Rule 4: </a:t>
+              <a:t>East or west: </a:t>
             </a:r>
             <a:pPr algn="l" indent="0" marL="0">
               <a:spcAft>
@@ -12401,7 +12839,7 @@
                 <a:ea typeface="Times New Roman" pitchFamily="34" charset="-122"/>
                 <a:cs typeface="Times New Roman" pitchFamily="34" charset="-120"/>
               </a:rPr>
-              <a:t>When we cross the International Date Line, the day changes.</a:t>
+              <a:t>We add the time difference for a place to the east and remove it for a place to the west.</a:t>
             </a:r>
             <a:endParaRPr lang="en-US" sz="4000" dirty="0"/>
           </a:p>
@@ -12536,7 +12974,7 @@
         <p:spPr>
           <a:xfrm>
             <a:off x="0" y="658368"/>
-            <a:ext cx="2468880" cy="5833872"/>
+            <a:ext cx="5120640" cy="5833872"/>
           </a:xfrm>
           <a:prstGeom prst="rect">
             <a:avLst/>
@@ -12551,8 +12989,8 @@
         </p:nvSpPr>
         <p:spPr>
           <a:xfrm>
-            <a:off x="2697480" y="1005840"/>
-            <a:ext cx="9174175" cy="731520"/>
+            <a:off x="5349240" y="1005840"/>
+            <a:ext cx="6522415" cy="731520"/>
           </a:xfrm>
           <a:prstGeom prst="rect">
             <a:avLst/>
@@ -12578,7 +13016,7 @@
                 <a:ea typeface="Times New Roman" pitchFamily="34" charset="-122"/>
                 <a:cs typeface="Times New Roman" pitchFamily="34" charset="-120"/>
               </a:rPr>
-              <a:t>2. Worked Example</a:t>
+              <a:t>1. Sun Time (Local Time)</a:t>
             </a:r>
             <a:endParaRPr lang="en-US" sz="3600" dirty="0"/>
           </a:p>
@@ -12592,8 +13030,47 @@
         </p:nvSpPr>
         <p:spPr>
           <a:xfrm>
-            <a:off x="2697480" y="1783080"/>
-            <a:ext cx="9174175" cy="4663440"/>
+            <a:off x="5349240" y="1737360"/>
+            <a:ext cx="6522415" cy="457200"/>
+          </a:xfrm>
+          <a:prstGeom prst="rect">
+            <a:avLst/>
+          </a:prstGeom>
+          <a:noFill/>
+          <a:ln/>
+        </p:spPr>
+        <p:txBody>
+          <a:bodyPr wrap="square" lIns="0" tIns="0" rIns="0" bIns="0" rtlCol="0" anchor="ctr"/>
+          <a:lstStyle/>
+          <a:p>
+            <a:pPr algn="l" indent="0" marL="0">
+              <a:buNone/>
+            </a:pPr>
+            <a:r>
+              <a:rPr lang="en-US" sz="2500" b="1" dirty="0">
+                <a:solidFill>
+                  <a:srgbClr val="990011"/>
+                </a:solidFill>
+                <a:latin typeface="Times New Roman" pitchFamily="34" charset="0"/>
+                <a:ea typeface="Times New Roman" pitchFamily="34" charset="-122"/>
+                <a:cs typeface="Times New Roman" pitchFamily="34" charset="-120"/>
+              </a:rPr>
+              <a:t>A) Local Time from Longitude (continued)</a:t>
+            </a:r>
+            <a:endParaRPr lang="en-US" sz="2500" dirty="0"/>
+          </a:p>
+        </p:txBody>
+      </p:sp>
+      <p:sp>
+        <p:nvSpPr>
+          <p:cNvPr id="6" name="Text 3"/>
+          <p:cNvSpPr/>
+          <p:nvPr/>
+        </p:nvSpPr>
+        <p:spPr>
+          <a:xfrm>
+            <a:off x="5349240" y="2240280"/>
+            <a:ext cx="6522415" cy="4206240"/>
           </a:xfrm>
           <a:prstGeom prst="rect">
             <a:avLst/>
@@ -12612,7 +13089,7 @@
               <a:buNone/>
             </a:pPr>
             <a:r>
-              <a:rPr lang="en-US" sz="4000" i="1" dirty="0">
+              <a:rPr lang="en-US" sz="4000" b="1" dirty="0">
                 <a:solidFill>
                   <a:srgbClr val="111111"/>
                 </a:solidFill>
@@ -12620,11 +13097,8 @@
                 <a:ea typeface="Times New Roman" pitchFamily="34" charset="-122"/>
                 <a:cs typeface="Times New Roman" pitchFamily="34" charset="-120"/>
               </a:rPr>
-              <a:t>The time at 43° E when it is 12:00 in Garoua (13° E) is found as follows:</a:t>
-            </a:r>
-            <a:endParaRPr lang="en-US" sz="4000" dirty="0"/>
-          </a:p>
-          <a:p>
+              <a:t>Example: </a:t>
+            </a:r>
             <a:pPr algn="l" indent="0" marL="0">
               <a:spcAft>
                 <a:spcPts val="800"/>
@@ -12632,7 +13106,7 @@
               <a:buNone/>
             </a:pPr>
             <a:r>
-              <a:rPr lang="en-US" sz="4000" b="1" dirty="0">
+              <a:rPr lang="en-US" sz="4000" dirty="0">
                 <a:solidFill>
                   <a:srgbClr val="111111"/>
                 </a:solidFill>
@@ -12640,61 +13114,7 @@
                 <a:ea typeface="Times New Roman" pitchFamily="34" charset="-122"/>
                 <a:cs typeface="Times New Roman" pitchFamily="34" charset="-120"/>
               </a:rPr>
-              <a:t>Difference: </a:t>
-            </a:r>
-            <a:pPr algn="l" indent="0" marL="0">
-              <a:spcAft>
-                <a:spcPts val="800"/>
-              </a:spcAft>
-              <a:buNone/>
-            </a:pPr>
-            <a:r>
-              <a:rPr lang="en-US" sz="4000" dirty="0">
-                <a:solidFill>
-                  <a:srgbClr val="111111"/>
-                </a:solidFill>
-                <a:latin typeface="Times New Roman" pitchFamily="34" charset="0"/>
-                <a:ea typeface="Times New Roman" pitchFamily="34" charset="-122"/>
-                <a:cs typeface="Times New Roman" pitchFamily="34" charset="-120"/>
-              </a:rPr>
-              <a:t>The difference of longitude is 43° − 13° = 30°.</a:t>
-            </a:r>
-            <a:endParaRPr lang="en-US" sz="4000" dirty="0"/>
-          </a:p>
-          <a:p>
-            <a:pPr algn="l" indent="0" marL="0">
-              <a:spcAft>
-                <a:spcPts val="800"/>
-              </a:spcAft>
-              <a:buNone/>
-            </a:pPr>
-            <a:r>
-              <a:rPr lang="en-US" sz="4000" b="1" dirty="0">
-                <a:solidFill>
-                  <a:srgbClr val="111111"/>
-                </a:solidFill>
-                <a:latin typeface="Times New Roman" pitchFamily="34" charset="0"/>
-                <a:ea typeface="Times New Roman" pitchFamily="34" charset="-122"/>
-                <a:cs typeface="Times New Roman" pitchFamily="34" charset="-120"/>
-              </a:rPr>
-              <a:t>Time: </a:t>
-            </a:r>
-            <a:pPr algn="l" indent="0" marL="0">
-              <a:spcAft>
-                <a:spcPts val="800"/>
-              </a:spcAft>
-              <a:buNone/>
-            </a:pPr>
-            <a:r>
-              <a:rPr lang="en-US" sz="4000" dirty="0">
-                <a:solidFill>
-                  <a:srgbClr val="111111"/>
-                </a:solidFill>
-                <a:latin typeface="Times New Roman" pitchFamily="34" charset="0"/>
-                <a:ea typeface="Times New Roman" pitchFamily="34" charset="-122"/>
-                <a:cs typeface="Times New Roman" pitchFamily="34" charset="-120"/>
-              </a:rPr>
-              <a:t>The time difference is 30 × 4 minutes = 120 minutes, which is 2 hours.</a:t>
+              <a:t>Garoua (13° E) 12:00; at 43° E: 30° × 4 = 120 min = 2 h, so 14:00.</a:t>
             </a:r>
             <a:endParaRPr lang="en-US" sz="4000" dirty="0"/>
           </a:p>
@@ -12829,7 +13249,7 @@
         <p:spPr>
           <a:xfrm>
             <a:off x="0" y="658368"/>
-            <a:ext cx="5120640" cy="5833872"/>
+            <a:ext cx="2468880" cy="5833872"/>
           </a:xfrm>
           <a:prstGeom prst="rect">
             <a:avLst/>
@@ -12844,8 +13264,8 @@
         </p:nvSpPr>
         <p:spPr>
           <a:xfrm>
-            <a:off x="5349240" y="1005840"/>
-            <a:ext cx="6522415" cy="731520"/>
+            <a:off x="2697480" y="1005840"/>
+            <a:ext cx="9174175" cy="731520"/>
           </a:xfrm>
           <a:prstGeom prst="rect">
             <a:avLst/>
@@ -12871,7 +13291,7 @@
                 <a:ea typeface="Times New Roman" pitchFamily="34" charset="-122"/>
                 <a:cs typeface="Times New Roman" pitchFamily="34" charset="-120"/>
               </a:rPr>
-              <a:t>2. Worked Example (continued)</a:t>
+              <a:t>1. Sun Time (Local Time)</a:t>
             </a:r>
             <a:endParaRPr lang="en-US" sz="3600" dirty="0"/>
           </a:p>
@@ -12885,8 +13305,47 @@
         </p:nvSpPr>
         <p:spPr>
           <a:xfrm>
-            <a:off x="5349240" y="1783080"/>
-            <a:ext cx="6522415" cy="4663440"/>
+            <a:off x="2697480" y="1737360"/>
+            <a:ext cx="9174175" cy="457200"/>
+          </a:xfrm>
+          <a:prstGeom prst="rect">
+            <a:avLst/>
+          </a:prstGeom>
+          <a:noFill/>
+          <a:ln/>
+        </p:spPr>
+        <p:txBody>
+          <a:bodyPr wrap="square" lIns="0" tIns="0" rIns="0" bIns="0" rtlCol="0" anchor="ctr"/>
+          <a:lstStyle/>
+          <a:p>
+            <a:pPr algn="l" indent="0" marL="0">
+              <a:buNone/>
+            </a:pPr>
+            <a:r>
+              <a:rPr lang="en-US" sz="3200" b="1" dirty="0">
+                <a:solidFill>
+                  <a:srgbClr val="990011"/>
+                </a:solidFill>
+                <a:latin typeface="Times New Roman" pitchFamily="34" charset="0"/>
+                <a:ea typeface="Times New Roman" pitchFamily="34" charset="-122"/>
+                <a:cs typeface="Times New Roman" pitchFamily="34" charset="-120"/>
+              </a:rPr>
+              <a:t>B) Longitude from Local Time</a:t>
+            </a:r>
+            <a:endParaRPr lang="en-US" sz="3200" dirty="0"/>
+          </a:p>
+        </p:txBody>
+      </p:sp>
+      <p:sp>
+        <p:nvSpPr>
+          <p:cNvPr id="6" name="Text 3"/>
+          <p:cNvSpPr/>
+          <p:nvPr/>
+        </p:nvSpPr>
+        <p:spPr>
+          <a:xfrm>
+            <a:off x="2697480" y="2240280"/>
+            <a:ext cx="9174175" cy="4206240"/>
           </a:xfrm>
           <a:prstGeom prst="rect">
             <a:avLst/>
@@ -12905,7 +13364,7 @@
               <a:buNone/>
             </a:pPr>
             <a:r>
-              <a:rPr lang="en-US" sz="4000" b="1" dirty="0">
+              <a:rPr lang="en-US" sz="4000" i="1" dirty="0">
                 <a:solidFill>
                   <a:srgbClr val="111111"/>
                 </a:solidFill>
@@ -12913,8 +13372,11 @@
                 <a:ea typeface="Times New Roman" pitchFamily="34" charset="-122"/>
                 <a:cs typeface="Times New Roman" pitchFamily="34" charset="-120"/>
               </a:rPr>
-              <a:t>Answer: </a:t>
-            </a:r>
+              <a:t>Longitude is calculated from local time with the following rules:</a:t>
+            </a:r>
+            <a:endParaRPr lang="en-US" sz="4000" dirty="0"/>
+          </a:p>
+          <a:p>
             <a:pPr algn="l" indent="0" marL="0">
               <a:spcAft>
                 <a:spcPts val="800"/>
@@ -12922,7 +13384,7 @@
               <a:buNone/>
             </a:pPr>
             <a:r>
-              <a:rPr lang="en-US" sz="4000" dirty="0">
+              <a:rPr lang="en-US" sz="4000" b="1" dirty="0">
                 <a:solidFill>
                   <a:srgbClr val="111111"/>
                 </a:solidFill>
@@ -12930,7 +13392,61 @@
                 <a:ea typeface="Times New Roman" pitchFamily="34" charset="-122"/>
                 <a:cs typeface="Times New Roman" pitchFamily="34" charset="-120"/>
               </a:rPr>
-              <a:t>The place is to the east, so the time is 12:00 + 2 hours = 14:00.</a:t>
+              <a:t>Time difference: </a:t>
+            </a:r>
+            <a:pPr algn="l" indent="0" marL="0">
+              <a:spcAft>
+                <a:spcPts val="800"/>
+              </a:spcAft>
+              <a:buNone/>
+            </a:pPr>
+            <a:r>
+              <a:rPr lang="en-US" sz="4000" dirty="0">
+                <a:solidFill>
+                  <a:srgbClr val="111111"/>
+                </a:solidFill>
+                <a:latin typeface="Times New Roman" pitchFamily="34" charset="0"/>
+                <a:ea typeface="Times New Roman" pitchFamily="34" charset="-122"/>
+                <a:cs typeface="Times New Roman" pitchFamily="34" charset="-120"/>
+              </a:rPr>
+              <a:t>We find the difference between the two local times in minutes.</a:t>
+            </a:r>
+            <a:endParaRPr lang="en-US" sz="4000" dirty="0"/>
+          </a:p>
+          <a:p>
+            <a:pPr algn="l" indent="0" marL="0">
+              <a:spcAft>
+                <a:spcPts val="800"/>
+              </a:spcAft>
+              <a:buNone/>
+            </a:pPr>
+            <a:r>
+              <a:rPr lang="en-US" sz="4000" b="1" dirty="0">
+                <a:solidFill>
+                  <a:srgbClr val="111111"/>
+                </a:solidFill>
+                <a:latin typeface="Times New Roman" pitchFamily="34" charset="0"/>
+                <a:ea typeface="Times New Roman" pitchFamily="34" charset="-122"/>
+                <a:cs typeface="Times New Roman" pitchFamily="34" charset="-120"/>
+              </a:rPr>
+              <a:t>Difference of longitude: </a:t>
+            </a:r>
+            <a:pPr algn="l" indent="0" marL="0">
+              <a:spcAft>
+                <a:spcPts val="800"/>
+              </a:spcAft>
+              <a:buNone/>
+            </a:pPr>
+            <a:r>
+              <a:rPr lang="en-US" sz="4000" dirty="0">
+                <a:solidFill>
+                  <a:srgbClr val="111111"/>
+                </a:solidFill>
+                <a:latin typeface="Times New Roman" pitchFamily="34" charset="0"/>
+                <a:ea typeface="Times New Roman" pitchFamily="34" charset="-122"/>
+                <a:cs typeface="Times New Roman" pitchFamily="34" charset="-120"/>
+              </a:rPr>
+              <a:t>We divide the time difference by 4 to get the degrees.</a:t>
             </a:r>
             <a:endParaRPr lang="en-US" sz="4000" dirty="0"/>
           </a:p>
@@ -13048,48 +13564,9 @@
           </a:p>
         </p:txBody>
       </p:sp>
-      <p:sp>
-        <p:nvSpPr>
-          <p:cNvPr id="3" name="Text 1"/>
-          <p:cNvSpPr/>
-          <p:nvPr/>
-        </p:nvSpPr>
-        <p:spPr>
-          <a:xfrm>
-            <a:off x="457200" y="1005840"/>
-            <a:ext cx="11277295" cy="731520"/>
-          </a:xfrm>
-          <a:prstGeom prst="rect">
-            <a:avLst/>
-          </a:prstGeom>
-          <a:noFill/>
-          <a:ln/>
-        </p:spPr>
-        <p:txBody>
-          <a:bodyPr wrap="square" lIns="0" tIns="0" rIns="0" bIns="0" rtlCol="0" anchor="ctr"/>
-          <a:lstStyle/>
-          <a:p>
-            <a:pPr algn="ctr" indent="0" marL="0">
-              <a:buNone/>
-            </a:pPr>
-            <a:r>
-              <a:rPr lang="en-US" sz="3600" b="1" dirty="0">
-                <a:solidFill>
-                  <a:srgbClr val="990011"/>
-                </a:solidFill>
-                <a:latin typeface="Times New Roman" pitchFamily="34" charset="0"/>
-                <a:ea typeface="Times New Roman" pitchFamily="34" charset="-122"/>
-                <a:cs typeface="Times New Roman" pitchFamily="34" charset="-120"/>
-              </a:rPr>
-              <a:t>2. Worked Example</a:t>
-            </a:r>
-            <a:endParaRPr lang="en-US" sz="3600" dirty="0"/>
-          </a:p>
-        </p:txBody>
-      </p:sp>
       <p:pic>
         <p:nvPicPr>
-          <p:cNvPr id="4" name="Image 0" descr="/home/claude/f4/img/v2/time_calc_big.png">    </p:cNvPr>
+          <p:cNvPr id="3" name="Image 0" descr="/home/claude/f4/img/minesec_sheet.png">    </p:cNvPr>
           <p:cNvPicPr>
             <a:picLocks noChangeAspect="1"/>
           </p:cNvPicPr>
@@ -13103,8 +13580,8 @@
         </p:blipFill>
         <p:spPr>
           <a:xfrm>
-            <a:off x="629930" y="1783080"/>
-            <a:ext cx="10931835" cy="4270248"/>
+            <a:off x="0" y="658368"/>
+            <a:ext cx="3840480" cy="5833872"/>
           </a:xfrm>
           <a:prstGeom prst="rect">
             <a:avLst/>
@@ -13113,14 +13590,14 @@
       </p:pic>
       <p:sp>
         <p:nvSpPr>
-          <p:cNvPr id="5" name="Text 2"/>
+          <p:cNvPr id="4" name="Text 1"/>
           <p:cNvSpPr/>
           <p:nvPr/>
         </p:nvSpPr>
         <p:spPr>
           <a:xfrm>
-            <a:off x="457200" y="6089904"/>
-            <a:ext cx="11277295" cy="347472"/>
+            <a:off x="4069080" y="1005840"/>
+            <a:ext cx="7802575" cy="731520"/>
           </a:xfrm>
           <a:prstGeom prst="rect">
             <a:avLst/>
@@ -13129,24 +13606,161 @@
           <a:ln/>
         </p:spPr>
         <p:txBody>
-          <a:bodyPr wrap="square" lIns="0" tIns="0" rIns="0" bIns="0" rtlCol="0" anchor="ctr"/>
+          <a:bodyPr wrap="square" lIns="0" tIns="0" rIns="0" bIns="0" rtlCol="0" anchor="ctr">
+            <a:normAutofit/>
+          </a:bodyPr>
           <a:lstStyle/>
           <a:p>
             <a:pPr algn="ctr" indent="0" marL="0">
               <a:buNone/>
             </a:pPr>
             <a:r>
-              <a:rPr lang="en-US" sz="1800" i="1" dirty="0">
-                <a:solidFill>
-                  <a:srgbClr val="555555"/>
+              <a:rPr lang="en-US" sz="3600" b="1" dirty="0">
+                <a:solidFill>
+                  <a:srgbClr val="990011"/>
                 </a:solidFill>
                 <a:latin typeface="Times New Roman" pitchFamily="34" charset="0"/>
                 <a:ea typeface="Times New Roman" pitchFamily="34" charset="-122"/>
                 <a:cs typeface="Times New Roman" pitchFamily="34" charset="-120"/>
               </a:rPr>
-              <a:t>Illustration: calculating sun time</a:t>
-            </a:r>
-            <a:endParaRPr lang="en-US" sz="1800" dirty="0"/>
+              <a:t>1. Sun Time (Local Time)</a:t>
+            </a:r>
+            <a:endParaRPr lang="en-US" sz="3600" dirty="0"/>
+          </a:p>
+        </p:txBody>
+      </p:sp>
+      <p:sp>
+        <p:nvSpPr>
+          <p:cNvPr id="5" name="Text 2"/>
+          <p:cNvSpPr/>
+          <p:nvPr/>
+        </p:nvSpPr>
+        <p:spPr>
+          <a:xfrm>
+            <a:off x="4069080" y="1737360"/>
+            <a:ext cx="7802575" cy="457200"/>
+          </a:xfrm>
+          <a:prstGeom prst="rect">
+            <a:avLst/>
+          </a:prstGeom>
+          <a:noFill/>
+          <a:ln/>
+        </p:spPr>
+        <p:txBody>
+          <a:bodyPr wrap="square" lIns="0" tIns="0" rIns="0" bIns="0" rtlCol="0" anchor="ctr"/>
+          <a:lstStyle/>
+          <a:p>
+            <a:pPr algn="l" indent="0" marL="0">
+              <a:buNone/>
+            </a:pPr>
+            <a:r>
+              <a:rPr lang="en-US" sz="3000" b="1" dirty="0">
+                <a:solidFill>
+                  <a:srgbClr val="990011"/>
+                </a:solidFill>
+                <a:latin typeface="Times New Roman" pitchFamily="34" charset="0"/>
+                <a:ea typeface="Times New Roman" pitchFamily="34" charset="-122"/>
+                <a:cs typeface="Times New Roman" pitchFamily="34" charset="-120"/>
+              </a:rPr>
+              <a:t>B) Longitude from Local Time (continued)</a:t>
+            </a:r>
+            <a:endParaRPr lang="en-US" sz="3000" dirty="0"/>
+          </a:p>
+        </p:txBody>
+      </p:sp>
+      <p:sp>
+        <p:nvSpPr>
+          <p:cNvPr id="6" name="Text 3"/>
+          <p:cNvSpPr/>
+          <p:nvPr/>
+        </p:nvSpPr>
+        <p:spPr>
+          <a:xfrm>
+            <a:off x="4069080" y="2240280"/>
+            <a:ext cx="7802575" cy="4206240"/>
+          </a:xfrm>
+          <a:prstGeom prst="rect">
+            <a:avLst/>
+          </a:prstGeom>
+          <a:noFill/>
+          <a:ln/>
+        </p:spPr>
+        <p:txBody>
+          <a:bodyPr wrap="square" lIns="0" tIns="0" rIns="0" bIns="0" rtlCol="0" anchor="t"/>
+          <a:lstStyle/>
+          <a:p>
+            <a:pPr algn="l" indent="0" marL="0">
+              <a:spcAft>
+                <a:spcPts val="800"/>
+              </a:spcAft>
+              <a:buNone/>
+            </a:pPr>
+            <a:r>
+              <a:rPr lang="en-US" sz="4000" b="1" dirty="0">
+                <a:solidFill>
+                  <a:srgbClr val="111111"/>
+                </a:solidFill>
+                <a:latin typeface="Times New Roman" pitchFamily="34" charset="0"/>
+                <a:ea typeface="Times New Roman" pitchFamily="34" charset="-122"/>
+                <a:cs typeface="Times New Roman" pitchFamily="34" charset="-120"/>
+              </a:rPr>
+              <a:t>Direction: </a:t>
+            </a:r>
+            <a:pPr algn="l" indent="0" marL="0">
+              <a:spcAft>
+                <a:spcPts val="800"/>
+              </a:spcAft>
+              <a:buNone/>
+            </a:pPr>
+            <a:r>
+              <a:rPr lang="en-US" sz="4000" dirty="0">
+                <a:solidFill>
+                  <a:srgbClr val="111111"/>
+                </a:solidFill>
+                <a:latin typeface="Times New Roman" pitchFamily="34" charset="0"/>
+                <a:ea typeface="Times New Roman" pitchFamily="34" charset="-122"/>
+                <a:cs typeface="Times New Roman" pitchFamily="34" charset="-120"/>
+              </a:rPr>
+              <a:t>If the place is ahead in time it is to the east; if it is behind, it is to the west.</a:t>
+            </a:r>
+            <a:endParaRPr lang="en-US" sz="4000" dirty="0"/>
+          </a:p>
+          <a:p>
+            <a:pPr algn="l" indent="0" marL="0">
+              <a:spcAft>
+                <a:spcPts val="800"/>
+              </a:spcAft>
+              <a:buNone/>
+            </a:pPr>
+            <a:r>
+              <a:rPr lang="en-US" sz="4000" b="1" dirty="0">
+                <a:solidFill>
+                  <a:srgbClr val="111111"/>
+                </a:solidFill>
+                <a:latin typeface="Times New Roman" pitchFamily="34" charset="0"/>
+                <a:ea typeface="Times New Roman" pitchFamily="34" charset="-122"/>
+                <a:cs typeface="Times New Roman" pitchFamily="34" charset="-120"/>
+              </a:rPr>
+              <a:t>Example: </a:t>
+            </a:r>
+            <a:pPr algn="l" indent="0" marL="0">
+              <a:spcAft>
+                <a:spcPts val="800"/>
+              </a:spcAft>
+              <a:buNone/>
+            </a:pPr>
+            <a:r>
+              <a:rPr lang="en-US" sz="4000" dirty="0">
+                <a:solidFill>
+                  <a:srgbClr val="111111"/>
+                </a:solidFill>
+                <a:latin typeface="Times New Roman" pitchFamily="34" charset="0"/>
+                <a:ea typeface="Times New Roman" pitchFamily="34" charset="-122"/>
+                <a:cs typeface="Times New Roman" pitchFamily="34" charset="-120"/>
+              </a:rPr>
+              <a:t>It is 12:00 at 0° and 14:00 at place X: 120 ÷ 4 = 30°, so X is at 30° E.</a:t>
+            </a:r>
+            <a:endParaRPr lang="en-US" sz="4000" dirty="0"/>
           </a:p>
         </p:txBody>
       </p:sp>
@@ -13256,15 +13870,135 @@
                 <a:ea typeface="Calibri" pitchFamily="34" charset="-122"/>
                 <a:cs typeface="Calibri" pitchFamily="34" charset="-120"/>
               </a:rPr>
-              <a:t>FORMATIVE EVALUATION</a:t>
+              <a:t>BOARD SUMMARY</a:t>
             </a:r>
             <a:endParaRPr lang="en-US" sz="1400" dirty="0"/>
+          </a:p>
+        </p:txBody>
+      </p:sp>
+      <p:sp>
+        <p:nvSpPr>
+          <p:cNvPr id="3" name="Text 1"/>
+          <p:cNvSpPr/>
+          <p:nvPr/>
+        </p:nvSpPr>
+        <p:spPr>
+          <a:xfrm>
+            <a:off x="365760" y="1005840"/>
+            <a:ext cx="11460175" cy="731520"/>
+          </a:xfrm>
+          <a:prstGeom prst="rect">
+            <a:avLst/>
+          </a:prstGeom>
+          <a:noFill/>
+          <a:ln/>
+        </p:spPr>
+        <p:txBody>
+          <a:bodyPr wrap="square" lIns="0" tIns="0" rIns="0" bIns="0" rtlCol="0" anchor="ctr">
+            <a:normAutofit/>
+          </a:bodyPr>
+          <a:lstStyle/>
+          <a:p>
+            <a:pPr algn="ctr" indent="0" marL="0">
+              <a:buNone/>
+            </a:pPr>
+            <a:r>
+              <a:rPr lang="en-US" sz="3600" b="1" dirty="0">
+                <a:solidFill>
+                  <a:srgbClr val="990011"/>
+                </a:solidFill>
+                <a:latin typeface="Times New Roman" pitchFamily="34" charset="0"/>
+                <a:ea typeface="Times New Roman" pitchFamily="34" charset="-122"/>
+                <a:cs typeface="Times New Roman" pitchFamily="34" charset="-120"/>
+              </a:rPr>
+              <a:t>2. Standard Time from Standard Time Zones</a:t>
+            </a:r>
+            <a:endParaRPr lang="en-US" sz="3600" dirty="0"/>
+          </a:p>
+        </p:txBody>
+      </p:sp>
+      <p:sp>
+        <p:nvSpPr>
+          <p:cNvPr id="4" name="Text 2"/>
+          <p:cNvSpPr/>
+          <p:nvPr/>
+        </p:nvSpPr>
+        <p:spPr>
+          <a:xfrm>
+            <a:off x="365760" y="1783080"/>
+            <a:ext cx="4846320" cy="4617720"/>
+          </a:xfrm>
+          <a:prstGeom prst="rect">
+            <a:avLst/>
+          </a:prstGeom>
+          <a:noFill/>
+          <a:ln/>
+        </p:spPr>
+        <p:txBody>
+          <a:bodyPr wrap="square" lIns="0" tIns="0" rIns="0" bIns="0" rtlCol="0" anchor="t"/>
+          <a:lstStyle/>
+          <a:p>
+            <a:pPr algn="l" indent="0" marL="0">
+              <a:spcAft>
+                <a:spcPts val="800"/>
+              </a:spcAft>
+              <a:buNone/>
+            </a:pPr>
+            <a:r>
+              <a:rPr lang="en-US" sz="3600" i="1" dirty="0">
+                <a:solidFill>
+                  <a:srgbClr val="111111"/>
+                </a:solidFill>
+                <a:latin typeface="Times New Roman" pitchFamily="34" charset="0"/>
+                <a:ea typeface="Times New Roman" pitchFamily="34" charset="-122"/>
+                <a:cs typeface="Times New Roman" pitchFamily="34" charset="-120"/>
+              </a:rPr>
+              <a:t>Standard time is calculated with time zones as follows:</a:t>
+            </a:r>
+            <a:endParaRPr lang="en-US" sz="3600" dirty="0"/>
+          </a:p>
+          <a:p>
+            <a:pPr algn="l" indent="0" marL="0">
+              <a:spcAft>
+                <a:spcPts val="800"/>
+              </a:spcAft>
+              <a:buNone/>
+            </a:pPr>
+            <a:r>
+              <a:rPr lang="en-US" sz="3600" b="1" dirty="0">
+                <a:solidFill>
+                  <a:srgbClr val="111111"/>
+                </a:solidFill>
+                <a:latin typeface="Times New Roman" pitchFamily="34" charset="0"/>
+                <a:ea typeface="Times New Roman" pitchFamily="34" charset="-122"/>
+                <a:cs typeface="Times New Roman" pitchFamily="34" charset="-120"/>
+              </a:rPr>
+              <a:t>Reading the zones: </a:t>
+            </a:r>
+            <a:pPr algn="l" indent="0" marL="0">
+              <a:spcAft>
+                <a:spcPts val="800"/>
+              </a:spcAft>
+              <a:buNone/>
+            </a:pPr>
+            <a:r>
+              <a:rPr lang="en-US" sz="3600" dirty="0">
+                <a:solidFill>
+                  <a:srgbClr val="111111"/>
+                </a:solidFill>
+                <a:latin typeface="Times New Roman" pitchFamily="34" charset="0"/>
+                <a:ea typeface="Times New Roman" pitchFamily="34" charset="-122"/>
+                <a:cs typeface="Times New Roman" pitchFamily="34" charset="-120"/>
+              </a:rPr>
+              <a:t>We read the zone of each place in hours ahead of GMT (+) or behind GMT (−).</a:t>
+            </a:r>
+            <a:endParaRPr lang="en-US" sz="3600" dirty="0"/>
           </a:p>
         </p:txBody>
       </p:sp>
       <p:pic>
         <p:nvPicPr>
-          <p:cNvPr id="3" name="Image 0" descr="/home/claude/f4/img/minesec_sheet.png">    </p:cNvPr>
+          <p:cNvPr id="5" name="Image 0" descr="/home/claude/f4/img/v2/time_zones_big.png">    </p:cNvPr>
           <p:cNvPicPr>
             <a:picLocks noChangeAspect="1"/>
           </p:cNvPicPr>
@@ -13278,8 +14012,8 @@
         </p:blipFill>
         <p:spPr>
           <a:xfrm>
-            <a:off x="0" y="658368"/>
-            <a:ext cx="5120640" cy="5833872"/>
+            <a:off x="5349240" y="2513450"/>
+            <a:ext cx="6659575" cy="2809508"/>
           </a:xfrm>
           <a:prstGeom prst="rect">
             <a:avLst/>
@@ -13288,14 +14022,14 @@
       </p:pic>
       <p:sp>
         <p:nvSpPr>
-          <p:cNvPr id="4" name="Text 1"/>
+          <p:cNvPr id="6" name="Text 3"/>
           <p:cNvSpPr/>
           <p:nvPr/>
         </p:nvSpPr>
         <p:spPr>
           <a:xfrm>
-            <a:off x="5349240" y="1005840"/>
-            <a:ext cx="6522415" cy="731520"/>
+            <a:off x="5349240" y="6089904"/>
+            <a:ext cx="6659575" cy="347472"/>
           </a:xfrm>
           <a:prstGeom prst="rect">
             <a:avLst/>
@@ -13304,68 +14038,24 @@
           <a:ln/>
         </p:spPr>
         <p:txBody>
-          <a:bodyPr wrap="square" lIns="0" tIns="0" rIns="0" bIns="0" rtlCol="0" anchor="ctr">
-            <a:normAutofit/>
-          </a:bodyPr>
+          <a:bodyPr wrap="square" lIns="0" tIns="0" rIns="0" bIns="0" rtlCol="0" anchor="ctr"/>
           <a:lstStyle/>
           <a:p>
             <a:pPr algn="ctr" indent="0" marL="0">
               <a:buNone/>
             </a:pPr>
             <a:r>
-              <a:rPr lang="en-US" sz="3600" b="1" dirty="0">
-                <a:solidFill>
-                  <a:srgbClr val="990011"/>
+              <a:rPr lang="en-US" sz="1600" i="1" dirty="0">
+                <a:solidFill>
+                  <a:srgbClr val="555555"/>
                 </a:solidFill>
                 <a:latin typeface="Times New Roman" pitchFamily="34" charset="0"/>
                 <a:ea typeface="Times New Roman" pitchFamily="34" charset="-122"/>
                 <a:cs typeface="Times New Roman" pitchFamily="34" charset="-120"/>
               </a:rPr>
-              <a:t>Evaluation 1</a:t>
-            </a:r>
-            <a:endParaRPr lang="en-US" sz="3600" dirty="0"/>
-          </a:p>
-        </p:txBody>
-      </p:sp>
-      <p:sp>
-        <p:nvSpPr>
-          <p:cNvPr id="5" name="Text 2"/>
-          <p:cNvSpPr/>
-          <p:nvPr/>
-        </p:nvSpPr>
-        <p:spPr>
-          <a:xfrm>
-            <a:off x="5349240" y="1783080"/>
-            <a:ext cx="6522415" cy="4663440"/>
-          </a:xfrm>
-          <a:prstGeom prst="rect">
-            <a:avLst/>
-          </a:prstGeom>
-          <a:noFill/>
-          <a:ln/>
-        </p:spPr>
-        <p:txBody>
-          <a:bodyPr wrap="square" lIns="0" tIns="0" rIns="0" bIns="0" rtlCol="0" anchor="t"/>
-          <a:lstStyle/>
-          <a:p>
-            <a:pPr algn="l" indent="0" marL="0">
-              <a:spcAft>
-                <a:spcPts val="800"/>
-              </a:spcAft>
-              <a:buNone/>
-            </a:pPr>
-            <a:r>
-              <a:rPr lang="en-US" sz="4000" dirty="0">
-                <a:solidFill>
-                  <a:srgbClr val="111111"/>
-                </a:solidFill>
-                <a:latin typeface="Times New Roman" pitchFamily="34" charset="0"/>
-                <a:ea typeface="Times New Roman" pitchFamily="34" charset="-122"/>
-                <a:cs typeface="Times New Roman" pitchFamily="34" charset="-120"/>
-              </a:rPr>
-              <a:t>It is 10:00 at Garoua (13° E). What is the local time at 17° W?</a:t>
-            </a:r>
-            <a:endParaRPr lang="en-US" sz="4000" dirty="0"/>
+              <a:t>Illustration: the time zones of the world</a:t>
+            </a:r>
+            <a:endParaRPr lang="en-US" sz="1600" dirty="0"/>
           </a:p>
         </p:txBody>
       </p:sp>
@@ -13475,7 +14165,7 @@
                 <a:ea typeface="Calibri" pitchFamily="34" charset="-122"/>
                 <a:cs typeface="Calibri" pitchFamily="34" charset="-120"/>
               </a:rPr>
-              <a:t>FORMATIVE EVALUATION</a:t>
+              <a:t>BOARD SUMMARY</a:t>
             </a:r>
             <a:endParaRPr lang="en-US" sz="1400" dirty="0"/>
           </a:p>
@@ -13540,7 +14230,7 @@
                 <a:ea typeface="Times New Roman" pitchFamily="34" charset="-122"/>
                 <a:cs typeface="Times New Roman" pitchFamily="34" charset="-120"/>
               </a:rPr>
-              <a:t>Expected Answer</a:t>
+              <a:t>2. Standard Time from Standard Time Zones</a:t>
             </a:r>
             <a:endParaRPr lang="en-US" sz="3600" dirty="0"/>
           </a:p>
@@ -13574,7 +14264,7 @@
               <a:buNone/>
             </a:pPr>
             <a:r>
-              <a:rPr lang="en-US" sz="4000" dirty="0">
+              <a:rPr lang="en-US" sz="4000" b="1" dirty="0">
                 <a:solidFill>
                   <a:srgbClr val="111111"/>
                 </a:solidFill>
@@ -13582,7 +14272,61 @@
                 <a:ea typeface="Times New Roman" pitchFamily="34" charset="-122"/>
                 <a:cs typeface="Times New Roman" pitchFamily="34" charset="-120"/>
               </a:rPr>
-              <a:t>08:00 (30° = 2 hours, we remove).</a:t>
+              <a:t>Time difference: </a:t>
+            </a:r>
+            <a:pPr algn="l" indent="0" marL="0">
+              <a:spcAft>
+                <a:spcPts val="800"/>
+              </a:spcAft>
+              <a:buNone/>
+            </a:pPr>
+            <a:r>
+              <a:rPr lang="en-US" sz="4000" dirty="0">
+                <a:solidFill>
+                  <a:srgbClr val="111111"/>
+                </a:solidFill>
+                <a:latin typeface="Times New Roman" pitchFamily="34" charset="0"/>
+                <a:ea typeface="Times New Roman" pitchFamily="34" charset="-122"/>
+                <a:cs typeface="Times New Roman" pitchFamily="34" charset="-120"/>
+              </a:rPr>
+              <a:t>We find the difference in hours between the two zones.</a:t>
+            </a:r>
+            <a:endParaRPr lang="en-US" sz="4000" dirty="0"/>
+          </a:p>
+          <a:p>
+            <a:pPr algn="l" indent="0" marL="0">
+              <a:spcAft>
+                <a:spcPts val="800"/>
+              </a:spcAft>
+              <a:buNone/>
+            </a:pPr>
+            <a:r>
+              <a:rPr lang="en-US" sz="4000" b="1" dirty="0">
+                <a:solidFill>
+                  <a:srgbClr val="111111"/>
+                </a:solidFill>
+                <a:latin typeface="Times New Roman" pitchFamily="34" charset="0"/>
+                <a:ea typeface="Times New Roman" pitchFamily="34" charset="-122"/>
+                <a:cs typeface="Times New Roman" pitchFamily="34" charset="-120"/>
+              </a:rPr>
+              <a:t>Example: </a:t>
+            </a:r>
+            <a:pPr algn="l" indent="0" marL="0">
+              <a:spcAft>
+                <a:spcPts val="800"/>
+              </a:spcAft>
+              <a:buNone/>
+            </a:pPr>
+            <a:r>
+              <a:rPr lang="en-US" sz="4000" dirty="0">
+                <a:solidFill>
+                  <a:srgbClr val="111111"/>
+                </a:solidFill>
+                <a:latin typeface="Times New Roman" pitchFamily="34" charset="0"/>
+                <a:ea typeface="Times New Roman" pitchFamily="34" charset="-122"/>
+                <a:cs typeface="Times New Roman" pitchFamily="34" charset="-120"/>
+              </a:rPr>
+              <a:t>Garoua GMT + 1 at 22:00 Friday; Tokyo GMT + 9 is 8 hours ahead, so 06:00 Saturday.</a:t>
             </a:r>
             <a:endParaRPr lang="en-US" sz="4000" dirty="0"/>
           </a:p>
@@ -13694,15 +14438,135 @@
                 <a:ea typeface="Calibri" pitchFamily="34" charset="-122"/>
                 <a:cs typeface="Calibri" pitchFamily="34" charset="-120"/>
               </a:rPr>
-              <a:t>FORMATIVE EVALUATION</a:t>
+              <a:t>BOARD SUMMARY</a:t>
             </a:r>
             <a:endParaRPr lang="en-US" sz="1400" dirty="0"/>
+          </a:p>
+        </p:txBody>
+      </p:sp>
+      <p:sp>
+        <p:nvSpPr>
+          <p:cNvPr id="3" name="Text 1"/>
+          <p:cNvSpPr/>
+          <p:nvPr/>
+        </p:nvSpPr>
+        <p:spPr>
+          <a:xfrm>
+            <a:off x="365760" y="1005840"/>
+            <a:ext cx="11460175" cy="731520"/>
+          </a:xfrm>
+          <a:prstGeom prst="rect">
+            <a:avLst/>
+          </a:prstGeom>
+          <a:noFill/>
+          <a:ln/>
+        </p:spPr>
+        <p:txBody>
+          <a:bodyPr wrap="square" lIns="0" tIns="0" rIns="0" bIns="0" rtlCol="0" anchor="ctr">
+            <a:normAutofit/>
+          </a:bodyPr>
+          <a:lstStyle/>
+          <a:p>
+            <a:pPr algn="ctr" indent="0" marL="0">
+              <a:buNone/>
+            </a:pPr>
+            <a:r>
+              <a:rPr lang="en-US" sz="3600" b="1" dirty="0">
+                <a:solidFill>
+                  <a:srgbClr val="990011"/>
+                </a:solidFill>
+                <a:latin typeface="Times New Roman" pitchFamily="34" charset="0"/>
+                <a:ea typeface="Times New Roman" pitchFamily="34" charset="-122"/>
+                <a:cs typeface="Times New Roman" pitchFamily="34" charset="-120"/>
+              </a:rPr>
+              <a:t>3. Time and Date across the International Date Line</a:t>
+            </a:r>
+            <a:endParaRPr lang="en-US" sz="3600" dirty="0"/>
+          </a:p>
+        </p:txBody>
+      </p:sp>
+      <p:sp>
+        <p:nvSpPr>
+          <p:cNvPr id="4" name="Text 2"/>
+          <p:cNvSpPr/>
+          <p:nvPr/>
+        </p:nvSpPr>
+        <p:spPr>
+          <a:xfrm>
+            <a:off x="365760" y="1783080"/>
+            <a:ext cx="4846320" cy="4617720"/>
+          </a:xfrm>
+          <a:prstGeom prst="rect">
+            <a:avLst/>
+          </a:prstGeom>
+          <a:noFill/>
+          <a:ln/>
+        </p:spPr>
+        <p:txBody>
+          <a:bodyPr wrap="square" lIns="0" tIns="0" rIns="0" bIns="0" rtlCol="0" anchor="t"/>
+          <a:lstStyle/>
+          <a:p>
+            <a:pPr algn="l" indent="0" marL="0">
+              <a:spcAft>
+                <a:spcPts val="800"/>
+              </a:spcAft>
+              <a:buNone/>
+            </a:pPr>
+            <a:r>
+              <a:rPr lang="en-US" sz="3600" i="1" dirty="0">
+                <a:solidFill>
+                  <a:srgbClr val="111111"/>
+                </a:solidFill>
+                <a:latin typeface="Times New Roman" pitchFamily="34" charset="0"/>
+                <a:ea typeface="Times New Roman" pitchFamily="34" charset="-122"/>
+                <a:cs typeface="Times New Roman" pitchFamily="34" charset="-120"/>
+              </a:rPr>
+              <a:t>The date is calculated across the Date Line as follows:</a:t>
+            </a:r>
+            <a:endParaRPr lang="en-US" sz="3600" dirty="0"/>
+          </a:p>
+          <a:p>
+            <a:pPr algn="l" indent="0" marL="0">
+              <a:spcAft>
+                <a:spcPts val="800"/>
+              </a:spcAft>
+              <a:buNone/>
+            </a:pPr>
+            <a:r>
+              <a:rPr lang="en-US" sz="3600" b="1" dirty="0">
+                <a:solidFill>
+                  <a:srgbClr val="111111"/>
+                </a:solidFill>
+                <a:latin typeface="Times New Roman" pitchFamily="34" charset="0"/>
+                <a:ea typeface="Times New Roman" pitchFamily="34" charset="-122"/>
+                <a:cs typeface="Times New Roman" pitchFamily="34" charset="-120"/>
+              </a:rPr>
+              <a:t>Crossing westwards: </a:t>
+            </a:r>
+            <a:pPr algn="l" indent="0" marL="0">
+              <a:spcAft>
+                <a:spcPts val="800"/>
+              </a:spcAft>
+              <a:buNone/>
+            </a:pPr>
+            <a:r>
+              <a:rPr lang="en-US" sz="3600" dirty="0">
+                <a:solidFill>
+                  <a:srgbClr val="111111"/>
+                </a:solidFill>
+                <a:latin typeface="Times New Roman" pitchFamily="34" charset="0"/>
+                <a:ea typeface="Times New Roman" pitchFamily="34" charset="-122"/>
+                <a:cs typeface="Times New Roman" pitchFamily="34" charset="-120"/>
+              </a:rPr>
+              <a:t>A traveller going west across the line adds one day.</a:t>
+            </a:r>
+            <a:endParaRPr lang="en-US" sz="3600" dirty="0"/>
           </a:p>
         </p:txBody>
       </p:sp>
       <p:pic>
         <p:nvPicPr>
-          <p:cNvPr id="3" name="Image 0" descr="/home/claude/f4/img/minesec_sheet.png">    </p:cNvPr>
+          <p:cNvPr id="5" name="Image 0" descr="/home/claude/f4/img/v2/idl_big.png">    </p:cNvPr>
           <p:cNvPicPr>
             <a:picLocks noChangeAspect="1"/>
           </p:cNvPicPr>
@@ -13716,8 +14580,8 @@
         </p:blipFill>
         <p:spPr>
           <a:xfrm>
-            <a:off x="0" y="658368"/>
-            <a:ext cx="5120640" cy="5833872"/>
+            <a:off x="5349240" y="2617506"/>
+            <a:ext cx="6659575" cy="2601397"/>
           </a:xfrm>
           <a:prstGeom prst="rect">
             <a:avLst/>
@@ -13726,14 +14590,14 @@
       </p:pic>
       <p:sp>
         <p:nvSpPr>
-          <p:cNvPr id="4" name="Text 1"/>
+          <p:cNvPr id="6" name="Text 3"/>
           <p:cNvSpPr/>
           <p:nvPr/>
         </p:nvSpPr>
         <p:spPr>
           <a:xfrm>
-            <a:off x="5349240" y="1005840"/>
-            <a:ext cx="6522415" cy="731520"/>
+            <a:off x="5349240" y="6089904"/>
+            <a:ext cx="6659575" cy="347472"/>
           </a:xfrm>
           <a:prstGeom prst="rect">
             <a:avLst/>
@@ -13742,68 +14606,24 @@
           <a:ln/>
         </p:spPr>
         <p:txBody>
-          <a:bodyPr wrap="square" lIns="0" tIns="0" rIns="0" bIns="0" rtlCol="0" anchor="ctr">
-            <a:normAutofit/>
-          </a:bodyPr>
+          <a:bodyPr wrap="square" lIns="0" tIns="0" rIns="0" bIns="0" rtlCol="0" anchor="ctr"/>
           <a:lstStyle/>
           <a:p>
             <a:pPr algn="ctr" indent="0" marL="0">
               <a:buNone/>
             </a:pPr>
             <a:r>
-              <a:rPr lang="en-US" sz="3600" b="1" dirty="0">
-                <a:solidFill>
-                  <a:srgbClr val="990011"/>
+              <a:rPr lang="en-US" sz="1600" i="1" dirty="0">
+                <a:solidFill>
+                  <a:srgbClr val="555555"/>
                 </a:solidFill>
                 <a:latin typeface="Times New Roman" pitchFamily="34" charset="0"/>
                 <a:ea typeface="Times New Roman" pitchFamily="34" charset="-122"/>
                 <a:cs typeface="Times New Roman" pitchFamily="34" charset="-120"/>
               </a:rPr>
-              <a:t>Evaluation 2</a:t>
-            </a:r>
-            <a:endParaRPr lang="en-US" sz="3600" dirty="0"/>
-          </a:p>
-        </p:txBody>
-      </p:sp>
-      <p:sp>
-        <p:nvSpPr>
-          <p:cNvPr id="5" name="Text 2"/>
-          <p:cNvSpPr/>
-          <p:nvPr/>
-        </p:nvSpPr>
-        <p:spPr>
-          <a:xfrm>
-            <a:off x="5349240" y="1783080"/>
-            <a:ext cx="6522415" cy="4663440"/>
-          </a:xfrm>
-          <a:prstGeom prst="rect">
-            <a:avLst/>
-          </a:prstGeom>
-          <a:noFill/>
-          <a:ln/>
-        </p:spPr>
-        <p:txBody>
-          <a:bodyPr wrap="square" lIns="0" tIns="0" rIns="0" bIns="0" rtlCol="0" anchor="t"/>
-          <a:lstStyle/>
-          <a:p>
-            <a:pPr algn="l" indent="0" marL="0">
-              <a:spcAft>
-                <a:spcPts val="800"/>
-              </a:spcAft>
-              <a:buNone/>
-            </a:pPr>
-            <a:r>
-              <a:rPr lang="en-US" sz="4000" dirty="0">
-                <a:solidFill>
-                  <a:srgbClr val="111111"/>
-                </a:solidFill>
-                <a:latin typeface="Times New Roman" pitchFamily="34" charset="0"/>
-                <a:ea typeface="Times New Roman" pitchFamily="34" charset="-122"/>
-                <a:cs typeface="Times New Roman" pitchFamily="34" charset="-120"/>
-              </a:rPr>
-              <a:t>It is 22:00 on Friday in Garoua (GMT + 1). What time is it in Tokyo (GMT + 9)?</a:t>
-            </a:r>
-            <a:endParaRPr lang="en-US" sz="4000" dirty="0"/>
+              <a:t>Illustration: the International Date Line</a:t>
+            </a:r>
+            <a:endParaRPr lang="en-US" sz="1600" dirty="0"/>
           </a:p>
         </p:txBody>
       </p:sp>
@@ -13913,7 +14733,7 @@
                 <a:ea typeface="Calibri" pitchFamily="34" charset="-122"/>
                 <a:cs typeface="Calibri" pitchFamily="34" charset="-120"/>
               </a:rPr>
-              <a:t>FORMATIVE EVALUATION</a:t>
+              <a:t>BOARD SUMMARY</a:t>
             </a:r>
             <a:endParaRPr lang="en-US" sz="1400" dirty="0"/>
           </a:p>
@@ -13936,7 +14756,7 @@
         <p:spPr>
           <a:xfrm>
             <a:off x="0" y="658368"/>
-            <a:ext cx="5120640" cy="5833872"/>
+            <a:ext cx="2468880" cy="5833872"/>
           </a:xfrm>
           <a:prstGeom prst="rect">
             <a:avLst/>
@@ -13951,8 +14771,8 @@
         </p:nvSpPr>
         <p:spPr>
           <a:xfrm>
-            <a:off x="5349240" y="1005840"/>
-            <a:ext cx="6522415" cy="731520"/>
+            <a:off x="2697480" y="1005840"/>
+            <a:ext cx="9174175" cy="731520"/>
           </a:xfrm>
           <a:prstGeom prst="rect">
             <a:avLst/>
@@ -13978,7 +14798,7 @@
                 <a:ea typeface="Times New Roman" pitchFamily="34" charset="-122"/>
                 <a:cs typeface="Times New Roman" pitchFamily="34" charset="-120"/>
               </a:rPr>
-              <a:t>Expected Answer</a:t>
+              <a:t>3. Time and Date across the International Date Line</a:t>
             </a:r>
             <a:endParaRPr lang="en-US" sz="3600" dirty="0"/>
           </a:p>
@@ -13992,8 +14812,8 @@
         </p:nvSpPr>
         <p:spPr>
           <a:xfrm>
-            <a:off x="5349240" y="1783080"/>
-            <a:ext cx="6522415" cy="4663440"/>
+            <a:off x="2697480" y="1783080"/>
+            <a:ext cx="9174175" cy="4663440"/>
           </a:xfrm>
           <a:prstGeom prst="rect">
             <a:avLst/>
@@ -14012,7 +14832,7 @@
               <a:buNone/>
             </a:pPr>
             <a:r>
-              <a:rPr lang="en-US" sz="4000" dirty="0">
+              <a:rPr lang="en-US" sz="4000" b="1" dirty="0">
                 <a:solidFill>
                   <a:srgbClr val="111111"/>
                 </a:solidFill>
@@ -14020,7 +14840,98 @@
                 <a:ea typeface="Times New Roman" pitchFamily="34" charset="-122"/>
                 <a:cs typeface="Times New Roman" pitchFamily="34" charset="-120"/>
               </a:rPr>
-              <a:t>06:00 on Saturday.</a:t>
+              <a:t>Crossing eastwards: </a:t>
+            </a:r>
+            <a:pPr algn="l" indent="0" marL="0">
+              <a:spcAft>
+                <a:spcPts val="800"/>
+              </a:spcAft>
+              <a:buNone/>
+            </a:pPr>
+            <a:r>
+              <a:rPr lang="en-US" sz="4000" dirty="0">
+                <a:solidFill>
+                  <a:srgbClr val="111111"/>
+                </a:solidFill>
+                <a:latin typeface="Times New Roman" pitchFamily="34" charset="0"/>
+                <a:ea typeface="Times New Roman" pitchFamily="34" charset="-122"/>
+                <a:cs typeface="Times New Roman" pitchFamily="34" charset="-120"/>
+              </a:rPr>
+              <a:t>A traveller going east across the line removes one day.</a:t>
+            </a:r>
+            <a:endParaRPr lang="en-US" sz="4000" dirty="0"/>
+          </a:p>
+          <a:p>
+            <a:pPr algn="l" indent="0" marL="0">
+              <a:spcAft>
+                <a:spcPts val="800"/>
+              </a:spcAft>
+              <a:buNone/>
+            </a:pPr>
+            <a:r>
+              <a:rPr lang="en-US" sz="4000" b="1" dirty="0">
+                <a:solidFill>
+                  <a:srgbClr val="111111"/>
+                </a:solidFill>
+                <a:latin typeface="Times New Roman" pitchFamily="34" charset="0"/>
+                <a:ea typeface="Times New Roman" pitchFamily="34" charset="-122"/>
+                <a:cs typeface="Times New Roman" pitchFamily="34" charset="-120"/>
+              </a:rPr>
+              <a:t>Passing midnight: </a:t>
+            </a:r>
+            <a:pPr algn="l" indent="0" marL="0">
+              <a:spcAft>
+                <a:spcPts val="800"/>
+              </a:spcAft>
+              <a:buNone/>
+            </a:pPr>
+            <a:r>
+              <a:rPr lang="en-US" sz="4000" dirty="0">
+                <a:solidFill>
+                  <a:srgbClr val="111111"/>
+                </a:solidFill>
+                <a:latin typeface="Times New Roman" pitchFamily="34" charset="0"/>
+                <a:ea typeface="Times New Roman" pitchFamily="34" charset="-122"/>
+                <a:cs typeface="Times New Roman" pitchFamily="34" charset="-120"/>
+              </a:rPr>
+              <a:t>When a calculated time passes midnight, the date also changes.</a:t>
+            </a:r>
+            <a:endParaRPr lang="en-US" sz="4000" dirty="0"/>
+          </a:p>
+          <a:p>
+            <a:pPr algn="l" indent="0" marL="0">
+              <a:spcAft>
+                <a:spcPts val="800"/>
+              </a:spcAft>
+              <a:buNone/>
+            </a:pPr>
+            <a:r>
+              <a:rPr lang="en-US" sz="4000" b="1" dirty="0">
+                <a:solidFill>
+                  <a:srgbClr val="111111"/>
+                </a:solidFill>
+                <a:latin typeface="Times New Roman" pitchFamily="34" charset="0"/>
+                <a:ea typeface="Times New Roman" pitchFamily="34" charset="-122"/>
+                <a:cs typeface="Times New Roman" pitchFamily="34" charset="-120"/>
+              </a:rPr>
+              <a:t>Example: </a:t>
+            </a:r>
+            <a:pPr algn="l" indent="0" marL="0">
+              <a:spcAft>
+                <a:spcPts val="800"/>
+              </a:spcAft>
+              <a:buNone/>
+            </a:pPr>
+            <a:r>
+              <a:rPr lang="en-US" sz="4000" dirty="0">
+                <a:solidFill>
+                  <a:srgbClr val="111111"/>
+                </a:solidFill>
+                <a:latin typeface="Times New Roman" pitchFamily="34" charset="0"/>
+                <a:ea typeface="Times New Roman" pitchFamily="34" charset="-122"/>
+                <a:cs typeface="Times New Roman" pitchFamily="34" charset="-120"/>
+              </a:rPr>
+              <a:t>Sunday 10:00 just west of the line is Saturday 10:00 just east of it.</a:t>
             </a:r>
             <a:endParaRPr lang="en-US" sz="4000" dirty="0"/>
           </a:p>
@@ -14132,7 +15043,7 @@
                 <a:ea typeface="Calibri" pitchFamily="34" charset="-122"/>
                 <a:cs typeface="Calibri" pitchFamily="34" charset="-120"/>
               </a:rPr>
-              <a:t>REMEDIATION</a:t>
+              <a:t>FORMATIVE EVALUATION</a:t>
             </a:r>
             <a:endParaRPr lang="en-US" sz="1400" dirty="0"/>
           </a:p>
@@ -14155,7 +15066,7 @@
         <p:spPr>
           <a:xfrm>
             <a:off x="0" y="658368"/>
-            <a:ext cx="3840480" cy="5833872"/>
+            <a:ext cx="5120640" cy="5833872"/>
           </a:xfrm>
           <a:prstGeom prst="rect">
             <a:avLst/>
@@ -14170,8 +15081,8 @@
         </p:nvSpPr>
         <p:spPr>
           <a:xfrm>
-            <a:off x="4069080" y="1005840"/>
-            <a:ext cx="7802575" cy="731520"/>
+            <a:off x="5349240" y="1005840"/>
+            <a:ext cx="6522415" cy="731520"/>
           </a:xfrm>
           <a:prstGeom prst="rect">
             <a:avLst/>
@@ -14197,7 +15108,7 @@
                 <a:ea typeface="Times New Roman" pitchFamily="34" charset="-122"/>
                 <a:cs typeface="Times New Roman" pitchFamily="34" charset="-120"/>
               </a:rPr>
-              <a:t>Remediation</a:t>
+              <a:t>Evaluation 1</a:t>
             </a:r>
             <a:endParaRPr lang="en-US" sz="3600" dirty="0"/>
           </a:p>
@@ -14211,8 +15122,8 @@
         </p:nvSpPr>
         <p:spPr>
           <a:xfrm>
-            <a:off x="4069080" y="1783080"/>
-            <a:ext cx="7802575" cy="4663440"/>
+            <a:off x="5349240" y="1783080"/>
+            <a:ext cx="6522415" cy="4663440"/>
           </a:xfrm>
           <a:prstGeom prst="rect">
             <a:avLst/>
@@ -14231,7 +15142,7 @@
               <a:buNone/>
             </a:pPr>
             <a:r>
-              <a:rPr lang="en-US" sz="4000" b="1" dirty="0">
+              <a:rPr lang="en-US" sz="4000" dirty="0">
                 <a:solidFill>
                   <a:srgbClr val="111111"/>
                 </a:solidFill>
@@ -14239,73 +15150,7 @@
                 <a:ea typeface="Times New Roman" pitchFamily="34" charset="-122"/>
                 <a:cs typeface="Times New Roman" pitchFamily="34" charset="-120"/>
               </a:rPr>
-              <a:t>Fill in the blanks:</a:t>
-            </a:r>
-            <a:endParaRPr lang="en-US" sz="4000" dirty="0"/>
-          </a:p>
-          <a:p>
-            <a:pPr algn="l" marL="342900" indent="-342900">
-              <a:spcAft>
-                <a:spcPts val="800"/>
-              </a:spcAft>
-              <a:buSzPct val="100000"/>
-              <a:buFont typeface="+mj-lt"/>
-              <a:buAutoNum type="arabicPeriod" startAt="1"/>
-            </a:pPr>
-            <a:r>
-              <a:rPr lang="en-US" sz="4000" dirty="0">
-                <a:solidFill>
-                  <a:srgbClr val="111111"/>
-                </a:solidFill>
-                <a:latin typeface="Times New Roman" pitchFamily="34" charset="0"/>
-                <a:ea typeface="Times New Roman" pitchFamily="34" charset="-122"/>
-                <a:cs typeface="Times New Roman" pitchFamily="34" charset="-120"/>
-              </a:rPr>
-              <a:t>1° of longitude = ______ minutes.</a:t>
-            </a:r>
-            <a:endParaRPr lang="en-US" sz="4000" dirty="0"/>
-          </a:p>
-          <a:p>
-            <a:pPr algn="l" marL="342900" indent="-342900">
-              <a:spcAft>
-                <a:spcPts val="800"/>
-              </a:spcAft>
-              <a:buSzPct val="100000"/>
-              <a:buFont typeface="+mj-lt"/>
-              <a:buAutoNum type="arabicPeriod" startAt="1"/>
-            </a:pPr>
-            <a:r>
-              <a:rPr lang="en-US" sz="4000" dirty="0">
-                <a:solidFill>
-                  <a:srgbClr val="111111"/>
-                </a:solidFill>
-                <a:latin typeface="Times New Roman" pitchFamily="34" charset="0"/>
-                <a:ea typeface="Times New Roman" pitchFamily="34" charset="-122"/>
-                <a:cs typeface="Times New Roman" pitchFamily="34" charset="-120"/>
-              </a:rPr>
-              <a:t>Going west, we ______ time.</a:t>
-            </a:r>
-            <a:endParaRPr lang="en-US" sz="4000" dirty="0"/>
-          </a:p>
-          <a:p>
-            <a:pPr algn="l" marL="342900" indent="-342900">
-              <a:spcAft>
-                <a:spcPts val="800"/>
-              </a:spcAft>
-              <a:buSzPct val="100000"/>
-              <a:buFont typeface="+mj-lt"/>
-              <a:buAutoNum type="arabicPeriod" startAt="1"/>
-            </a:pPr>
-            <a:r>
-              <a:rPr lang="en-US" sz="4000" dirty="0">
-                <a:solidFill>
-                  <a:srgbClr val="111111"/>
-                </a:solidFill>
-                <a:latin typeface="Times New Roman" pitchFamily="34" charset="0"/>
-                <a:ea typeface="Times New Roman" pitchFamily="34" charset="-122"/>
-                <a:cs typeface="Times New Roman" pitchFamily="34" charset="-120"/>
-              </a:rPr>
-              <a:t>When the time passes midnight, the ______ changes.</a:t>
+              <a:t>It is 10:00 at Garoua (13° E). What is the local time at 17° W?</a:t>
             </a:r>
             <a:endParaRPr lang="en-US" sz="4000" dirty="0"/>
           </a:p>
@@ -14656,7 +15501,7 @@
                 <a:ea typeface="Calibri" pitchFamily="34" charset="-122"/>
                 <a:cs typeface="Calibri" pitchFamily="34" charset="-120"/>
               </a:rPr>
-              <a:t>HOMEWORK</a:t>
+              <a:t>FORMATIVE EVALUATION</a:t>
             </a:r>
             <a:endParaRPr lang="en-US" sz="1400" dirty="0"/>
           </a:p>
@@ -14721,7 +15566,7 @@
                 <a:ea typeface="Times New Roman" pitchFamily="34" charset="-122"/>
                 <a:cs typeface="Times New Roman" pitchFamily="34" charset="-120"/>
               </a:rPr>
-              <a:t>Homework</a:t>
+              <a:t>Expected Answer</a:t>
             </a:r>
             <a:endParaRPr lang="en-US" sz="3600" dirty="0"/>
           </a:p>
@@ -14763,7 +15608,7 @@
                 <a:ea typeface="Times New Roman" pitchFamily="34" charset="-122"/>
                 <a:cs typeface="Times New Roman" pitchFamily="34" charset="-120"/>
               </a:rPr>
-              <a:t>Watch the sunrise and the sunset one day this week and write down the times. Write a sentence to explain why the Sun rises in the east.</a:t>
+              <a:t>08:00 (30° = 2 hours, we remove).</a:t>
             </a:r>
             <a:endParaRPr lang="en-US" sz="4000" dirty="0"/>
           </a:p>
@@ -14875,7 +15720,7 @@
                 <a:ea typeface="Calibri" pitchFamily="34" charset="-122"/>
                 <a:cs typeface="Calibri" pitchFamily="34" charset="-120"/>
               </a:rPr>
-              <a:t>NEXT LESSON</a:t>
+              <a:t>FORMATIVE EVALUATION</a:t>
             </a:r>
             <a:endParaRPr lang="en-US" sz="1400" dirty="0"/>
           </a:p>
@@ -14940,7 +15785,7 @@
                 <a:ea typeface="Times New Roman" pitchFamily="34" charset="-122"/>
                 <a:cs typeface="Times New Roman" pitchFamily="34" charset="-120"/>
               </a:rPr>
-              <a:t>Next Lesson</a:t>
+              <a:t>Evaluation 2</a:t>
             </a:r>
             <a:endParaRPr lang="en-US" sz="3600" dirty="0"/>
           </a:p>
@@ -14964,17 +15809,17 @@
           <a:ln/>
         </p:spPr>
         <p:txBody>
-          <a:bodyPr wrap="square" lIns="0" tIns="0" rIns="0" bIns="0" rtlCol="0" anchor="ctr"/>
-          <a:lstStyle/>
-          <a:p>
-            <a:pPr algn="ctr" indent="0" marL="0">
+          <a:bodyPr wrap="square" lIns="0" tIns="0" rIns="0" bIns="0" rtlCol="0" anchor="t"/>
+          <a:lstStyle/>
+          <a:p>
+            <a:pPr algn="l" indent="0" marL="0">
               <a:spcAft>
                 <a:spcPts val="800"/>
               </a:spcAft>
               <a:buNone/>
             </a:pPr>
             <a:r>
-              <a:rPr lang="en-US" sz="4000" b="1" dirty="0">
+              <a:rPr lang="en-US" sz="4000" dirty="0">
                 <a:solidFill>
                   <a:srgbClr val="111111"/>
                 </a:solidFill>
@@ -14982,27 +15827,7 @@
                 <a:ea typeface="Times New Roman" pitchFamily="34" charset="-122"/>
                 <a:cs typeface="Times New Roman" pitchFamily="34" charset="-120"/>
               </a:rPr>
-              <a:t>Our next lesson will be on:</a:t>
-            </a:r>
-            <a:endParaRPr lang="en-US" sz="4000" dirty="0"/>
-          </a:p>
-          <a:p>
-            <a:pPr algn="ctr" indent="0" marL="0">
-              <a:spcAft>
-                <a:spcPts val="800"/>
-              </a:spcAft>
-              <a:buNone/>
-            </a:pPr>
-            <a:r>
-              <a:rPr lang="en-US" sz="4000" b="1" dirty="0">
-                <a:solidFill>
-                  <a:srgbClr val="990011"/>
-                </a:solidFill>
-                <a:latin typeface="Times New Roman" pitchFamily="34" charset="0"/>
-                <a:ea typeface="Times New Roman" pitchFamily="34" charset="-122"/>
-                <a:cs typeface="Times New Roman" pitchFamily="34" charset="-120"/>
-              </a:rPr>
-              <a:t>Lesson 5: The Rotation of the Earth</a:t>
+              <a:t>It is 22:00 on Friday in Garoua (GMT + 1). What time is it in Tokyo (GMT + 9)?</a:t>
             </a:r>
             <a:endParaRPr lang="en-US" sz="4000" dirty="0"/>
           </a:p>
@@ -15114,6 +15939,968 @@
                 <a:ea typeface="Calibri" pitchFamily="34" charset="-122"/>
                 <a:cs typeface="Calibri" pitchFamily="34" charset="-120"/>
               </a:rPr>
+              <a:t>FORMATIVE EVALUATION</a:t>
+            </a:r>
+            <a:endParaRPr lang="en-US" sz="1400" dirty="0"/>
+          </a:p>
+        </p:txBody>
+      </p:sp>
+      <p:pic>
+        <p:nvPicPr>
+          <p:cNvPr id="3" name="Image 0" descr="/home/claude/f4/img/minesec_sheet.png">    </p:cNvPr>
+          <p:cNvPicPr>
+            <a:picLocks noChangeAspect="1"/>
+          </p:cNvPicPr>
+          <p:nvPr/>
+        </p:nvPicPr>
+        <p:blipFill>
+          <a:blip r:embed="rId1"/>
+          <a:stretch>
+            <a:fillRect/>
+          </a:stretch>
+        </p:blipFill>
+        <p:spPr>
+          <a:xfrm>
+            <a:off x="0" y="658368"/>
+            <a:ext cx="5120640" cy="5833872"/>
+          </a:xfrm>
+          <a:prstGeom prst="rect">
+            <a:avLst/>
+          </a:prstGeom>
+        </p:spPr>
+      </p:pic>
+      <p:sp>
+        <p:nvSpPr>
+          <p:cNvPr id="4" name="Text 1"/>
+          <p:cNvSpPr/>
+          <p:nvPr/>
+        </p:nvSpPr>
+        <p:spPr>
+          <a:xfrm>
+            <a:off x="5349240" y="1005840"/>
+            <a:ext cx="6522415" cy="731520"/>
+          </a:xfrm>
+          <a:prstGeom prst="rect">
+            <a:avLst/>
+          </a:prstGeom>
+          <a:noFill/>
+          <a:ln/>
+        </p:spPr>
+        <p:txBody>
+          <a:bodyPr wrap="square" lIns="0" tIns="0" rIns="0" bIns="0" rtlCol="0" anchor="ctr">
+            <a:normAutofit/>
+          </a:bodyPr>
+          <a:lstStyle/>
+          <a:p>
+            <a:pPr algn="ctr" indent="0" marL="0">
+              <a:buNone/>
+            </a:pPr>
+            <a:r>
+              <a:rPr lang="en-US" sz="3600" b="1" dirty="0">
+                <a:solidFill>
+                  <a:srgbClr val="990011"/>
+                </a:solidFill>
+                <a:latin typeface="Times New Roman" pitchFamily="34" charset="0"/>
+                <a:ea typeface="Times New Roman" pitchFamily="34" charset="-122"/>
+                <a:cs typeface="Times New Roman" pitchFamily="34" charset="-120"/>
+              </a:rPr>
+              <a:t>Expected Answer</a:t>
+            </a:r>
+            <a:endParaRPr lang="en-US" sz="3600" dirty="0"/>
+          </a:p>
+        </p:txBody>
+      </p:sp>
+      <p:sp>
+        <p:nvSpPr>
+          <p:cNvPr id="5" name="Text 2"/>
+          <p:cNvSpPr/>
+          <p:nvPr/>
+        </p:nvSpPr>
+        <p:spPr>
+          <a:xfrm>
+            <a:off x="5349240" y="1783080"/>
+            <a:ext cx="6522415" cy="4663440"/>
+          </a:xfrm>
+          <a:prstGeom prst="rect">
+            <a:avLst/>
+          </a:prstGeom>
+          <a:noFill/>
+          <a:ln/>
+        </p:spPr>
+        <p:txBody>
+          <a:bodyPr wrap="square" lIns="0" tIns="0" rIns="0" bIns="0" rtlCol="0" anchor="t"/>
+          <a:lstStyle/>
+          <a:p>
+            <a:pPr algn="l" indent="0" marL="0">
+              <a:spcAft>
+                <a:spcPts val="800"/>
+              </a:spcAft>
+              <a:buNone/>
+            </a:pPr>
+            <a:r>
+              <a:rPr lang="en-US" sz="4000" dirty="0">
+                <a:solidFill>
+                  <a:srgbClr val="111111"/>
+                </a:solidFill>
+                <a:latin typeface="Times New Roman" pitchFamily="34" charset="0"/>
+                <a:ea typeface="Times New Roman" pitchFamily="34" charset="-122"/>
+                <a:cs typeface="Times New Roman" pitchFamily="34" charset="-120"/>
+              </a:rPr>
+              <a:t>06:00 on Saturday.</a:t>
+            </a:r>
+            <a:endParaRPr lang="en-US" sz="4000" dirty="0"/>
+          </a:p>
+        </p:txBody>
+      </p:sp>
+      <p:sp>
+        <p:nvSpPr>
+          <p:cNvPr id="25" name="Slide Number Placeholder 0"/>
+          <p:cNvSpPr>
+            <a:spLocks noGrp="1"/>
+          </p:cNvSpPr>
+          <p:nvPr>
+            <p:ph type="sldNum" sz="quarter" idx="4294967295"/>
+          </p:nvPr>
+        </p:nvSpPr>
+        <p:spPr>
+          <a:xfrm>
+            <a:off x="27432" y="91440"/>
+            <a:ext cx="585216" cy="475488"/>
+          </a:xfrm>
+          <a:prstGeom prst="rect">
+            <a:avLst/>
+          </a:prstGeom>
+          <a:extLst>
+            <a:ext uri="{C572A759-6A51-4108-AA02-DFA0A04FC94B}">
+              <ma14:wrappingTextBoxFlag xmlns:ma14="http://schemas.microsoft.com/office/mac/drawingml/2011/main" val="0"/>
+            </a:ext>
+          </a:extLst>
+        </p:spPr>
+        <p:txBody>
+          <a:bodyPr/>
+          <a:lstStyle>
+            <a:lvl1pPr>
+              <a:defRPr sz="2000">
+                <a:solidFill>
+                  <a:srgbClr val="FFFFFF"/>
+                </a:solidFill>
+                <a:latin typeface="Calibri"/>
+                <a:ea typeface="Calibri"/>
+                <a:cs typeface="Calibri"/>
+              </a:defRPr>
+            </a:lvl1pPr>
+          </a:lstStyle>
+          <a:p>
+            <a:pPr algn="ctr"/>
+            <a:fld id="{F7021451-1387-4CA6-816F-3879F97B5CBC}" type="slidenum">
+              <a:rPr b="1" lang="en-US"/>
+              <a:t>42</a:t>
+            </a:fld>
+            <a:endParaRPr lang="en-US"/>
+          </a:p>
+        </p:txBody>
+      </p:sp>
+    </p:spTree>
+  </p:cSld>
+  <p:clrMapOvr>
+    <a:masterClrMapping/>
+  </p:clrMapOvr>
+</p:sld>
+</file>
+
+<file path=ppt/slides/slide43.xml><?xml version="1.0" encoding="utf-8"?>
+<p:sld xmlns:a="http://schemas.openxmlformats.org/drawingml/2006/main" xmlns:r="http://schemas.openxmlformats.org/officeDocument/2006/relationships" xmlns:p="http://schemas.openxmlformats.org/presentationml/2006/main">
+  <p:cSld name="Slide 43">
+    <p:spTree>
+      <p:nvGrpSpPr>
+        <p:cNvPr id="1" name=""/>
+        <p:cNvGrpSpPr/>
+        <p:nvPr/>
+      </p:nvGrpSpPr>
+      <p:grpSpPr>
+        <a:xfrm>
+          <a:off x="0" y="0"/>
+          <a:ext cx="0" cy="0"/>
+          <a:chOff x="0" y="0"/>
+          <a:chExt cx="0" cy="0"/>
+        </a:xfrm>
+      </p:grpSpPr>
+      <p:sp>
+        <p:nvSpPr>
+          <p:cNvPr id="2" name="Text 0"/>
+          <p:cNvSpPr/>
+          <p:nvPr/>
+        </p:nvSpPr>
+        <p:spPr>
+          <a:xfrm>
+            <a:off x="457200" y="713232"/>
+            <a:ext cx="11368735" cy="274320"/>
+          </a:xfrm>
+          <a:prstGeom prst="rect">
+            <a:avLst/>
+          </a:prstGeom>
+          <a:noFill/>
+          <a:ln/>
+        </p:spPr>
+        <p:txBody>
+          <a:bodyPr wrap="square" lIns="0" tIns="0" rIns="0" bIns="0" rtlCol="0" anchor="ctr"/>
+          <a:lstStyle/>
+          <a:p>
+            <a:pPr algn="r" indent="0" marL="0">
+              <a:buNone/>
+            </a:pPr>
+            <a:r>
+              <a:rPr lang="en-US" sz="1400" b="1" dirty="0">
+                <a:solidFill>
+                  <a:srgbClr val="1C3F6E"/>
+                </a:solidFill>
+                <a:latin typeface="Calibri" pitchFamily="34" charset="0"/>
+                <a:ea typeface="Calibri" pitchFamily="34" charset="-122"/>
+                <a:cs typeface="Calibri" pitchFamily="34" charset="-120"/>
+              </a:rPr>
+              <a:t>REMEDIATION</a:t>
+            </a:r>
+            <a:endParaRPr lang="en-US" sz="1400" dirty="0"/>
+          </a:p>
+        </p:txBody>
+      </p:sp>
+      <p:pic>
+        <p:nvPicPr>
+          <p:cNvPr id="3" name="Image 0" descr="/home/claude/f4/img/minesec_sheet.png">    </p:cNvPr>
+          <p:cNvPicPr>
+            <a:picLocks noChangeAspect="1"/>
+          </p:cNvPicPr>
+          <p:nvPr/>
+        </p:nvPicPr>
+        <p:blipFill>
+          <a:blip r:embed="rId1"/>
+          <a:stretch>
+            <a:fillRect/>
+          </a:stretch>
+        </p:blipFill>
+        <p:spPr>
+          <a:xfrm>
+            <a:off x="0" y="658368"/>
+            <a:ext cx="3840480" cy="5833872"/>
+          </a:xfrm>
+          <a:prstGeom prst="rect">
+            <a:avLst/>
+          </a:prstGeom>
+        </p:spPr>
+      </p:pic>
+      <p:sp>
+        <p:nvSpPr>
+          <p:cNvPr id="4" name="Text 1"/>
+          <p:cNvSpPr/>
+          <p:nvPr/>
+        </p:nvSpPr>
+        <p:spPr>
+          <a:xfrm>
+            <a:off x="4069080" y="1005840"/>
+            <a:ext cx="7802575" cy="731520"/>
+          </a:xfrm>
+          <a:prstGeom prst="rect">
+            <a:avLst/>
+          </a:prstGeom>
+          <a:noFill/>
+          <a:ln/>
+        </p:spPr>
+        <p:txBody>
+          <a:bodyPr wrap="square" lIns="0" tIns="0" rIns="0" bIns="0" rtlCol="0" anchor="ctr">
+            <a:normAutofit/>
+          </a:bodyPr>
+          <a:lstStyle/>
+          <a:p>
+            <a:pPr algn="ctr" indent="0" marL="0">
+              <a:buNone/>
+            </a:pPr>
+            <a:r>
+              <a:rPr lang="en-US" sz="3600" b="1" dirty="0">
+                <a:solidFill>
+                  <a:srgbClr val="990011"/>
+                </a:solidFill>
+                <a:latin typeface="Times New Roman" pitchFamily="34" charset="0"/>
+                <a:ea typeface="Times New Roman" pitchFamily="34" charset="-122"/>
+                <a:cs typeface="Times New Roman" pitchFamily="34" charset="-120"/>
+              </a:rPr>
+              <a:t>Remediation</a:t>
+            </a:r>
+            <a:endParaRPr lang="en-US" sz="3600" dirty="0"/>
+          </a:p>
+        </p:txBody>
+      </p:sp>
+      <p:sp>
+        <p:nvSpPr>
+          <p:cNvPr id="5" name="Text 2"/>
+          <p:cNvSpPr/>
+          <p:nvPr/>
+        </p:nvSpPr>
+        <p:spPr>
+          <a:xfrm>
+            <a:off x="4069080" y="1783080"/>
+            <a:ext cx="7802575" cy="4663440"/>
+          </a:xfrm>
+          <a:prstGeom prst="rect">
+            <a:avLst/>
+          </a:prstGeom>
+          <a:noFill/>
+          <a:ln/>
+        </p:spPr>
+        <p:txBody>
+          <a:bodyPr wrap="square" lIns="0" tIns="0" rIns="0" bIns="0" rtlCol="0" anchor="t"/>
+          <a:lstStyle/>
+          <a:p>
+            <a:pPr algn="l" indent="0" marL="0">
+              <a:spcAft>
+                <a:spcPts val="800"/>
+              </a:spcAft>
+              <a:buNone/>
+            </a:pPr>
+            <a:r>
+              <a:rPr lang="en-US" sz="4000" b="1" dirty="0">
+                <a:solidFill>
+                  <a:srgbClr val="111111"/>
+                </a:solidFill>
+                <a:latin typeface="Times New Roman" pitchFamily="34" charset="0"/>
+                <a:ea typeface="Times New Roman" pitchFamily="34" charset="-122"/>
+                <a:cs typeface="Times New Roman" pitchFamily="34" charset="-120"/>
+              </a:rPr>
+              <a:t>Fill in the blanks:</a:t>
+            </a:r>
+            <a:endParaRPr lang="en-US" sz="4000" dirty="0"/>
+          </a:p>
+          <a:p>
+            <a:pPr algn="l" marL="342900" indent="-342900">
+              <a:spcAft>
+                <a:spcPts val="800"/>
+              </a:spcAft>
+              <a:buSzPct val="100000"/>
+              <a:buFont typeface="+mj-lt"/>
+              <a:buAutoNum type="arabicPeriod" startAt="1"/>
+            </a:pPr>
+            <a:r>
+              <a:rPr lang="en-US" sz="4000" dirty="0">
+                <a:solidFill>
+                  <a:srgbClr val="111111"/>
+                </a:solidFill>
+                <a:latin typeface="Times New Roman" pitchFamily="34" charset="0"/>
+                <a:ea typeface="Times New Roman" pitchFamily="34" charset="-122"/>
+                <a:cs typeface="Times New Roman" pitchFamily="34" charset="-120"/>
+              </a:rPr>
+              <a:t>1° of longitude = ______ minutes.</a:t>
+            </a:r>
+            <a:endParaRPr lang="en-US" sz="4000" dirty="0"/>
+          </a:p>
+          <a:p>
+            <a:pPr algn="l" marL="342900" indent="-342900">
+              <a:spcAft>
+                <a:spcPts val="800"/>
+              </a:spcAft>
+              <a:buSzPct val="100000"/>
+              <a:buFont typeface="+mj-lt"/>
+              <a:buAutoNum type="arabicPeriod" startAt="1"/>
+            </a:pPr>
+            <a:r>
+              <a:rPr lang="en-US" sz="4000" dirty="0">
+                <a:solidFill>
+                  <a:srgbClr val="111111"/>
+                </a:solidFill>
+                <a:latin typeface="Times New Roman" pitchFamily="34" charset="0"/>
+                <a:ea typeface="Times New Roman" pitchFamily="34" charset="-122"/>
+                <a:cs typeface="Times New Roman" pitchFamily="34" charset="-120"/>
+              </a:rPr>
+              <a:t>Going west, we ______ time.</a:t>
+            </a:r>
+            <a:endParaRPr lang="en-US" sz="4000" dirty="0"/>
+          </a:p>
+          <a:p>
+            <a:pPr algn="l" marL="342900" indent="-342900">
+              <a:spcAft>
+                <a:spcPts val="800"/>
+              </a:spcAft>
+              <a:buSzPct val="100000"/>
+              <a:buFont typeface="+mj-lt"/>
+              <a:buAutoNum type="arabicPeriod" startAt="1"/>
+            </a:pPr>
+            <a:r>
+              <a:rPr lang="en-US" sz="4000" dirty="0">
+                <a:solidFill>
+                  <a:srgbClr val="111111"/>
+                </a:solidFill>
+                <a:latin typeface="Times New Roman" pitchFamily="34" charset="0"/>
+                <a:ea typeface="Times New Roman" pitchFamily="34" charset="-122"/>
+                <a:cs typeface="Times New Roman" pitchFamily="34" charset="-120"/>
+              </a:rPr>
+              <a:t>When the time passes midnight, the ______ changes.</a:t>
+            </a:r>
+            <a:endParaRPr lang="en-US" sz="4000" dirty="0"/>
+          </a:p>
+        </p:txBody>
+      </p:sp>
+      <p:sp>
+        <p:nvSpPr>
+          <p:cNvPr id="25" name="Slide Number Placeholder 0"/>
+          <p:cNvSpPr>
+            <a:spLocks noGrp="1"/>
+          </p:cNvSpPr>
+          <p:nvPr>
+            <p:ph type="sldNum" sz="quarter" idx="4294967295"/>
+          </p:nvPr>
+        </p:nvSpPr>
+        <p:spPr>
+          <a:xfrm>
+            <a:off x="27432" y="91440"/>
+            <a:ext cx="585216" cy="475488"/>
+          </a:xfrm>
+          <a:prstGeom prst="rect">
+            <a:avLst/>
+          </a:prstGeom>
+          <a:extLst>
+            <a:ext uri="{C572A759-6A51-4108-AA02-DFA0A04FC94B}">
+              <ma14:wrappingTextBoxFlag xmlns:ma14="http://schemas.microsoft.com/office/mac/drawingml/2011/main" val="0"/>
+            </a:ext>
+          </a:extLst>
+        </p:spPr>
+        <p:txBody>
+          <a:bodyPr/>
+          <a:lstStyle>
+            <a:lvl1pPr>
+              <a:defRPr sz="2000">
+                <a:solidFill>
+                  <a:srgbClr val="FFFFFF"/>
+                </a:solidFill>
+                <a:latin typeface="Calibri"/>
+                <a:ea typeface="Calibri"/>
+                <a:cs typeface="Calibri"/>
+              </a:defRPr>
+            </a:lvl1pPr>
+          </a:lstStyle>
+          <a:p>
+            <a:pPr algn="ctr"/>
+            <a:fld id="{F7021451-1387-4CA6-816F-3879F97B5CBC}" type="slidenum">
+              <a:rPr b="1" lang="en-US"/>
+              <a:t>43</a:t>
+            </a:fld>
+            <a:endParaRPr lang="en-US"/>
+          </a:p>
+        </p:txBody>
+      </p:sp>
+    </p:spTree>
+  </p:cSld>
+  <p:clrMapOvr>
+    <a:masterClrMapping/>
+  </p:clrMapOvr>
+</p:sld>
+</file>
+
+<file path=ppt/slides/slide44.xml><?xml version="1.0" encoding="utf-8"?>
+<p:sld xmlns:a="http://schemas.openxmlformats.org/drawingml/2006/main" xmlns:r="http://schemas.openxmlformats.org/officeDocument/2006/relationships" xmlns:p="http://schemas.openxmlformats.org/presentationml/2006/main">
+  <p:cSld name="Slide 44">
+    <p:spTree>
+      <p:nvGrpSpPr>
+        <p:cNvPr id="1" name=""/>
+        <p:cNvGrpSpPr/>
+        <p:nvPr/>
+      </p:nvGrpSpPr>
+      <p:grpSpPr>
+        <a:xfrm>
+          <a:off x="0" y="0"/>
+          <a:ext cx="0" cy="0"/>
+          <a:chOff x="0" y="0"/>
+          <a:chExt cx="0" cy="0"/>
+        </a:xfrm>
+      </p:grpSpPr>
+      <p:sp>
+        <p:nvSpPr>
+          <p:cNvPr id="2" name="Text 0"/>
+          <p:cNvSpPr/>
+          <p:nvPr/>
+        </p:nvSpPr>
+        <p:spPr>
+          <a:xfrm>
+            <a:off x="457200" y="713232"/>
+            <a:ext cx="11368735" cy="274320"/>
+          </a:xfrm>
+          <a:prstGeom prst="rect">
+            <a:avLst/>
+          </a:prstGeom>
+          <a:noFill/>
+          <a:ln/>
+        </p:spPr>
+        <p:txBody>
+          <a:bodyPr wrap="square" lIns="0" tIns="0" rIns="0" bIns="0" rtlCol="0" anchor="ctr"/>
+          <a:lstStyle/>
+          <a:p>
+            <a:pPr algn="r" indent="0" marL="0">
+              <a:buNone/>
+            </a:pPr>
+            <a:r>
+              <a:rPr lang="en-US" sz="1400" b="1" dirty="0">
+                <a:solidFill>
+                  <a:srgbClr val="1C3F6E"/>
+                </a:solidFill>
+                <a:latin typeface="Calibri" pitchFamily="34" charset="0"/>
+                <a:ea typeface="Calibri" pitchFamily="34" charset="-122"/>
+                <a:cs typeface="Calibri" pitchFamily="34" charset="-120"/>
+              </a:rPr>
+              <a:t>HOMEWORK</a:t>
+            </a:r>
+            <a:endParaRPr lang="en-US" sz="1400" dirty="0"/>
+          </a:p>
+        </p:txBody>
+      </p:sp>
+      <p:pic>
+        <p:nvPicPr>
+          <p:cNvPr id="3" name="Image 0" descr="/home/claude/f4/img/minesec_sheet.png">    </p:cNvPr>
+          <p:cNvPicPr>
+            <a:picLocks noChangeAspect="1"/>
+          </p:cNvPicPr>
+          <p:nvPr/>
+        </p:nvPicPr>
+        <p:blipFill>
+          <a:blip r:embed="rId1"/>
+          <a:stretch>
+            <a:fillRect/>
+          </a:stretch>
+        </p:blipFill>
+        <p:spPr>
+          <a:xfrm>
+            <a:off x="0" y="658368"/>
+            <a:ext cx="5120640" cy="5833872"/>
+          </a:xfrm>
+          <a:prstGeom prst="rect">
+            <a:avLst/>
+          </a:prstGeom>
+        </p:spPr>
+      </p:pic>
+      <p:sp>
+        <p:nvSpPr>
+          <p:cNvPr id="4" name="Text 1"/>
+          <p:cNvSpPr/>
+          <p:nvPr/>
+        </p:nvSpPr>
+        <p:spPr>
+          <a:xfrm>
+            <a:off x="5349240" y="1005840"/>
+            <a:ext cx="6522415" cy="731520"/>
+          </a:xfrm>
+          <a:prstGeom prst="rect">
+            <a:avLst/>
+          </a:prstGeom>
+          <a:noFill/>
+          <a:ln/>
+        </p:spPr>
+        <p:txBody>
+          <a:bodyPr wrap="square" lIns="0" tIns="0" rIns="0" bIns="0" rtlCol="0" anchor="ctr">
+            <a:normAutofit/>
+          </a:bodyPr>
+          <a:lstStyle/>
+          <a:p>
+            <a:pPr algn="ctr" indent="0" marL="0">
+              <a:buNone/>
+            </a:pPr>
+            <a:r>
+              <a:rPr lang="en-US" sz="3600" b="1" dirty="0">
+                <a:solidFill>
+                  <a:srgbClr val="990011"/>
+                </a:solidFill>
+                <a:latin typeface="Times New Roman" pitchFamily="34" charset="0"/>
+                <a:ea typeface="Times New Roman" pitchFamily="34" charset="-122"/>
+                <a:cs typeface="Times New Roman" pitchFamily="34" charset="-120"/>
+              </a:rPr>
+              <a:t>Homework</a:t>
+            </a:r>
+            <a:endParaRPr lang="en-US" sz="3600" dirty="0"/>
+          </a:p>
+        </p:txBody>
+      </p:sp>
+      <p:sp>
+        <p:nvSpPr>
+          <p:cNvPr id="5" name="Text 2"/>
+          <p:cNvSpPr/>
+          <p:nvPr/>
+        </p:nvSpPr>
+        <p:spPr>
+          <a:xfrm>
+            <a:off x="5349240" y="1783080"/>
+            <a:ext cx="6522415" cy="4663440"/>
+          </a:xfrm>
+          <a:prstGeom prst="rect">
+            <a:avLst/>
+          </a:prstGeom>
+          <a:noFill/>
+          <a:ln/>
+        </p:spPr>
+        <p:txBody>
+          <a:bodyPr wrap="square" lIns="0" tIns="0" rIns="0" bIns="0" rtlCol="0" anchor="t"/>
+          <a:lstStyle/>
+          <a:p>
+            <a:pPr algn="l" indent="0" marL="0">
+              <a:spcAft>
+                <a:spcPts val="800"/>
+              </a:spcAft>
+              <a:buNone/>
+            </a:pPr>
+            <a:r>
+              <a:rPr lang="en-US" sz="4000" dirty="0">
+                <a:solidFill>
+                  <a:srgbClr val="111111"/>
+                </a:solidFill>
+                <a:latin typeface="Times New Roman" pitchFamily="34" charset="0"/>
+                <a:ea typeface="Times New Roman" pitchFamily="34" charset="-122"/>
+                <a:cs typeface="Times New Roman" pitchFamily="34" charset="-120"/>
+              </a:rPr>
+              <a:t>Watch the sunrise and the sunset one day this week and write down the times. Write a sentence to explain why the Sun rises in the east.</a:t>
+            </a:r>
+            <a:endParaRPr lang="en-US" sz="4000" dirty="0"/>
+          </a:p>
+        </p:txBody>
+      </p:sp>
+      <p:sp>
+        <p:nvSpPr>
+          <p:cNvPr id="25" name="Slide Number Placeholder 0"/>
+          <p:cNvSpPr>
+            <a:spLocks noGrp="1"/>
+          </p:cNvSpPr>
+          <p:nvPr>
+            <p:ph type="sldNum" sz="quarter" idx="4294967295"/>
+          </p:nvPr>
+        </p:nvSpPr>
+        <p:spPr>
+          <a:xfrm>
+            <a:off x="27432" y="91440"/>
+            <a:ext cx="585216" cy="475488"/>
+          </a:xfrm>
+          <a:prstGeom prst="rect">
+            <a:avLst/>
+          </a:prstGeom>
+          <a:extLst>
+            <a:ext uri="{C572A759-6A51-4108-AA02-DFA0A04FC94B}">
+              <ma14:wrappingTextBoxFlag xmlns:ma14="http://schemas.microsoft.com/office/mac/drawingml/2011/main" val="0"/>
+            </a:ext>
+          </a:extLst>
+        </p:spPr>
+        <p:txBody>
+          <a:bodyPr/>
+          <a:lstStyle>
+            <a:lvl1pPr>
+              <a:defRPr sz="2000">
+                <a:solidFill>
+                  <a:srgbClr val="FFFFFF"/>
+                </a:solidFill>
+                <a:latin typeface="Calibri"/>
+                <a:ea typeface="Calibri"/>
+                <a:cs typeface="Calibri"/>
+              </a:defRPr>
+            </a:lvl1pPr>
+          </a:lstStyle>
+          <a:p>
+            <a:pPr algn="ctr"/>
+            <a:fld id="{F7021451-1387-4CA6-816F-3879F97B5CBC}" type="slidenum">
+              <a:rPr b="1" lang="en-US"/>
+              <a:t>44</a:t>
+            </a:fld>
+            <a:endParaRPr lang="en-US"/>
+          </a:p>
+        </p:txBody>
+      </p:sp>
+    </p:spTree>
+  </p:cSld>
+  <p:clrMapOvr>
+    <a:masterClrMapping/>
+  </p:clrMapOvr>
+</p:sld>
+</file>
+
+<file path=ppt/slides/slide45.xml><?xml version="1.0" encoding="utf-8"?>
+<p:sld xmlns:a="http://schemas.openxmlformats.org/drawingml/2006/main" xmlns:r="http://schemas.openxmlformats.org/officeDocument/2006/relationships" xmlns:p="http://schemas.openxmlformats.org/presentationml/2006/main">
+  <p:cSld name="Slide 45">
+    <p:spTree>
+      <p:nvGrpSpPr>
+        <p:cNvPr id="1" name=""/>
+        <p:cNvGrpSpPr/>
+        <p:nvPr/>
+      </p:nvGrpSpPr>
+      <p:grpSpPr>
+        <a:xfrm>
+          <a:off x="0" y="0"/>
+          <a:ext cx="0" cy="0"/>
+          <a:chOff x="0" y="0"/>
+          <a:chExt cx="0" cy="0"/>
+        </a:xfrm>
+      </p:grpSpPr>
+      <p:sp>
+        <p:nvSpPr>
+          <p:cNvPr id="2" name="Text 0"/>
+          <p:cNvSpPr/>
+          <p:nvPr/>
+        </p:nvSpPr>
+        <p:spPr>
+          <a:xfrm>
+            <a:off x="457200" y="713232"/>
+            <a:ext cx="11368735" cy="274320"/>
+          </a:xfrm>
+          <a:prstGeom prst="rect">
+            <a:avLst/>
+          </a:prstGeom>
+          <a:noFill/>
+          <a:ln/>
+        </p:spPr>
+        <p:txBody>
+          <a:bodyPr wrap="square" lIns="0" tIns="0" rIns="0" bIns="0" rtlCol="0" anchor="ctr"/>
+          <a:lstStyle/>
+          <a:p>
+            <a:pPr algn="r" indent="0" marL="0">
+              <a:buNone/>
+            </a:pPr>
+            <a:r>
+              <a:rPr lang="en-US" sz="1400" b="1" dirty="0">
+                <a:solidFill>
+                  <a:srgbClr val="1C3F6E"/>
+                </a:solidFill>
+                <a:latin typeface="Calibri" pitchFamily="34" charset="0"/>
+                <a:ea typeface="Calibri" pitchFamily="34" charset="-122"/>
+                <a:cs typeface="Calibri" pitchFamily="34" charset="-120"/>
+              </a:rPr>
+              <a:t>NEXT LESSON</a:t>
+            </a:r>
+            <a:endParaRPr lang="en-US" sz="1400" dirty="0"/>
+          </a:p>
+        </p:txBody>
+      </p:sp>
+      <p:pic>
+        <p:nvPicPr>
+          <p:cNvPr id="3" name="Image 0" descr="/home/claude/f4/img/minesec_sheet.png">    </p:cNvPr>
+          <p:cNvPicPr>
+            <a:picLocks noChangeAspect="1"/>
+          </p:cNvPicPr>
+          <p:nvPr/>
+        </p:nvPicPr>
+        <p:blipFill>
+          <a:blip r:embed="rId1"/>
+          <a:stretch>
+            <a:fillRect/>
+          </a:stretch>
+        </p:blipFill>
+        <p:spPr>
+          <a:xfrm>
+            <a:off x="0" y="658368"/>
+            <a:ext cx="5120640" cy="5833872"/>
+          </a:xfrm>
+          <a:prstGeom prst="rect">
+            <a:avLst/>
+          </a:prstGeom>
+        </p:spPr>
+      </p:pic>
+      <p:sp>
+        <p:nvSpPr>
+          <p:cNvPr id="4" name="Text 1"/>
+          <p:cNvSpPr/>
+          <p:nvPr/>
+        </p:nvSpPr>
+        <p:spPr>
+          <a:xfrm>
+            <a:off x="5349240" y="1005840"/>
+            <a:ext cx="6522415" cy="731520"/>
+          </a:xfrm>
+          <a:prstGeom prst="rect">
+            <a:avLst/>
+          </a:prstGeom>
+          <a:noFill/>
+          <a:ln/>
+        </p:spPr>
+        <p:txBody>
+          <a:bodyPr wrap="square" lIns="0" tIns="0" rIns="0" bIns="0" rtlCol="0" anchor="ctr">
+            <a:normAutofit/>
+          </a:bodyPr>
+          <a:lstStyle/>
+          <a:p>
+            <a:pPr algn="ctr" indent="0" marL="0">
+              <a:buNone/>
+            </a:pPr>
+            <a:r>
+              <a:rPr lang="en-US" sz="3600" b="1" dirty="0">
+                <a:solidFill>
+                  <a:srgbClr val="990011"/>
+                </a:solidFill>
+                <a:latin typeface="Times New Roman" pitchFamily="34" charset="0"/>
+                <a:ea typeface="Times New Roman" pitchFamily="34" charset="-122"/>
+                <a:cs typeface="Times New Roman" pitchFamily="34" charset="-120"/>
+              </a:rPr>
+              <a:t>Next Lesson</a:t>
+            </a:r>
+            <a:endParaRPr lang="en-US" sz="3600" dirty="0"/>
+          </a:p>
+        </p:txBody>
+      </p:sp>
+      <p:sp>
+        <p:nvSpPr>
+          <p:cNvPr id="5" name="Text 2"/>
+          <p:cNvSpPr/>
+          <p:nvPr/>
+        </p:nvSpPr>
+        <p:spPr>
+          <a:xfrm>
+            <a:off x="5349240" y="1783080"/>
+            <a:ext cx="6522415" cy="4663440"/>
+          </a:xfrm>
+          <a:prstGeom prst="rect">
+            <a:avLst/>
+          </a:prstGeom>
+          <a:noFill/>
+          <a:ln/>
+        </p:spPr>
+        <p:txBody>
+          <a:bodyPr wrap="square" lIns="0" tIns="0" rIns="0" bIns="0" rtlCol="0" anchor="ctr"/>
+          <a:lstStyle/>
+          <a:p>
+            <a:pPr algn="ctr" indent="0" marL="0">
+              <a:spcAft>
+                <a:spcPts val="800"/>
+              </a:spcAft>
+              <a:buNone/>
+            </a:pPr>
+            <a:r>
+              <a:rPr lang="en-US" sz="4000" b="1" dirty="0">
+                <a:solidFill>
+                  <a:srgbClr val="111111"/>
+                </a:solidFill>
+                <a:latin typeface="Times New Roman" pitchFamily="34" charset="0"/>
+                <a:ea typeface="Times New Roman" pitchFamily="34" charset="-122"/>
+                <a:cs typeface="Times New Roman" pitchFamily="34" charset="-120"/>
+              </a:rPr>
+              <a:t>Our next lesson will be on:</a:t>
+            </a:r>
+            <a:endParaRPr lang="en-US" sz="4000" dirty="0"/>
+          </a:p>
+          <a:p>
+            <a:pPr algn="ctr" indent="0" marL="0">
+              <a:spcAft>
+                <a:spcPts val="800"/>
+              </a:spcAft>
+              <a:buNone/>
+            </a:pPr>
+            <a:r>
+              <a:rPr lang="en-US" sz="4000" b="1" dirty="0">
+                <a:solidFill>
+                  <a:srgbClr val="990011"/>
+                </a:solidFill>
+                <a:latin typeface="Times New Roman" pitchFamily="34" charset="0"/>
+                <a:ea typeface="Times New Roman" pitchFamily="34" charset="-122"/>
+                <a:cs typeface="Times New Roman" pitchFamily="34" charset="-120"/>
+              </a:rPr>
+              <a:t>Lesson 5: The Rotation of the Earth</a:t>
+            </a:r>
+            <a:endParaRPr lang="en-US" sz="4000" dirty="0"/>
+          </a:p>
+        </p:txBody>
+      </p:sp>
+      <p:sp>
+        <p:nvSpPr>
+          <p:cNvPr id="25" name="Slide Number Placeholder 0"/>
+          <p:cNvSpPr>
+            <a:spLocks noGrp="1"/>
+          </p:cNvSpPr>
+          <p:nvPr>
+            <p:ph type="sldNum" sz="quarter" idx="4294967295"/>
+          </p:nvPr>
+        </p:nvSpPr>
+        <p:spPr>
+          <a:xfrm>
+            <a:off x="27432" y="91440"/>
+            <a:ext cx="585216" cy="475488"/>
+          </a:xfrm>
+          <a:prstGeom prst="rect">
+            <a:avLst/>
+          </a:prstGeom>
+          <a:extLst>
+            <a:ext uri="{C572A759-6A51-4108-AA02-DFA0A04FC94B}">
+              <ma14:wrappingTextBoxFlag xmlns:ma14="http://schemas.microsoft.com/office/mac/drawingml/2011/main" val="0"/>
+            </a:ext>
+          </a:extLst>
+        </p:spPr>
+        <p:txBody>
+          <a:bodyPr/>
+          <a:lstStyle>
+            <a:lvl1pPr>
+              <a:defRPr sz="2000">
+                <a:solidFill>
+                  <a:srgbClr val="FFFFFF"/>
+                </a:solidFill>
+                <a:latin typeface="Calibri"/>
+                <a:ea typeface="Calibri"/>
+                <a:cs typeface="Calibri"/>
+              </a:defRPr>
+            </a:lvl1pPr>
+          </a:lstStyle>
+          <a:p>
+            <a:pPr algn="ctr"/>
+            <a:fld id="{F7021451-1387-4CA6-816F-3879F97B5CBC}" type="slidenum">
+              <a:rPr b="1" lang="en-US"/>
+              <a:t>45</a:t>
+            </a:fld>
+            <a:endParaRPr lang="en-US"/>
+          </a:p>
+        </p:txBody>
+      </p:sp>
+    </p:spTree>
+  </p:cSld>
+  <p:clrMapOvr>
+    <a:masterClrMapping/>
+  </p:clrMapOvr>
+</p:sld>
+</file>
+
+<file path=ppt/slides/slide46.xml><?xml version="1.0" encoding="utf-8"?>
+<p:sld xmlns:a="http://schemas.openxmlformats.org/drawingml/2006/main" xmlns:r="http://schemas.openxmlformats.org/officeDocument/2006/relationships" xmlns:p="http://schemas.openxmlformats.org/presentationml/2006/main">
+  <p:cSld name="Slide 46">
+    <p:spTree>
+      <p:nvGrpSpPr>
+        <p:cNvPr id="1" name=""/>
+        <p:cNvGrpSpPr/>
+        <p:nvPr/>
+      </p:nvGrpSpPr>
+      <p:grpSpPr>
+        <a:xfrm>
+          <a:off x="0" y="0"/>
+          <a:ext cx="0" cy="0"/>
+          <a:chOff x="0" y="0"/>
+          <a:chExt cx="0" cy="0"/>
+        </a:xfrm>
+      </p:grpSpPr>
+      <p:sp>
+        <p:nvSpPr>
+          <p:cNvPr id="2" name="Text 0"/>
+          <p:cNvSpPr/>
+          <p:nvPr/>
+        </p:nvSpPr>
+        <p:spPr>
+          <a:xfrm>
+            <a:off x="457200" y="713232"/>
+            <a:ext cx="11368735" cy="274320"/>
+          </a:xfrm>
+          <a:prstGeom prst="rect">
+            <a:avLst/>
+          </a:prstGeom>
+          <a:noFill/>
+          <a:ln/>
+        </p:spPr>
+        <p:txBody>
+          <a:bodyPr wrap="square" lIns="0" tIns="0" rIns="0" bIns="0" rtlCol="0" anchor="ctr"/>
+          <a:lstStyle/>
+          <a:p>
+            <a:pPr algn="r" indent="0" marL="0">
+              <a:buNone/>
+            </a:pPr>
+            <a:r>
+              <a:rPr lang="en-US" sz="1400" b="1" dirty="0">
+                <a:solidFill>
+                  <a:srgbClr val="1C3F6E"/>
+                </a:solidFill>
+                <a:latin typeface="Calibri" pitchFamily="34" charset="0"/>
+                <a:ea typeface="Calibri" pitchFamily="34" charset="-122"/>
+                <a:cs typeface="Calibri" pitchFamily="34" charset="-120"/>
+              </a:rPr>
               <a:t>BILINGUAL GAME</a:t>
             </a:r>
             <a:endParaRPr lang="en-US" sz="1400" dirty="0"/>
@@ -15161,7 +16948,7 @@
       </p:sp>
       <p:graphicFrame>
         <p:nvGraphicFramePr>
-          <p:cNvPr id="43" name="Table 0"/>
+          <p:cNvPr id="47" name="Table 0"/>
           <p:cNvGraphicFramePr>
             <a:graphicFrameLocks noGrp="1"/>
           </p:cNvGraphicFramePr>
@@ -16473,7 +18260,7 @@
             <a:pPr algn="ctr"/>
             <a:fld id="{F7021451-1387-4CA6-816F-3879F97B5CBC}" type="slidenum">
               <a:rPr b="1" lang="en-US"/>
-              <a:t>42</a:t>
+              <a:t>46</a:t>
             </a:fld>
             <a:endParaRPr lang="en-US"/>
           </a:p>
@@ -16487,9 +18274,9 @@
 </p:sld>
 </file>
 
-<file path=ppt/slides/slide43.xml><?xml version="1.0" encoding="utf-8"?>
+<file path=ppt/slides/slide47.xml><?xml version="1.0" encoding="utf-8"?>
 <p:sld xmlns:a="http://schemas.openxmlformats.org/drawingml/2006/main" xmlns:r="http://schemas.openxmlformats.org/officeDocument/2006/relationships" xmlns:p="http://schemas.openxmlformats.org/presentationml/2006/main">
-  <p:cSld name="Slide 43">
+  <p:cSld name="Slide 47">
     <p:spTree>
       <p:nvGrpSpPr>
         <p:cNvPr id="1" name=""/>
@@ -16584,7 +18371,7 @@
       </p:sp>
       <p:graphicFrame>
         <p:nvGraphicFramePr>
-          <p:cNvPr id="44" name="Table 0"/>
+          <p:cNvPr id="48" name="Table 0"/>
           <p:cNvGraphicFramePr>
             <a:graphicFrameLocks noGrp="1"/>
           </p:cNvGraphicFramePr>
@@ -17206,7 +18993,7 @@
             <a:pPr algn="ctr"/>
             <a:fld id="{F7021451-1387-4CA6-816F-3879F97B5CBC}" type="slidenum">
               <a:rPr b="1" lang="en-US"/>
-              <a:t>43</a:t>
+              <a:t>47</a:t>
             </a:fld>
             <a:endParaRPr lang="en-US"/>
           </a:p>
@@ -17220,9 +19007,9 @@
 </p:sld>
 </file>
 
-<file path=ppt/slides/slide44.xml><?xml version="1.0" encoding="utf-8"?>
+<file path=ppt/slides/slide48.xml><?xml version="1.0" encoding="utf-8"?>
 <p:sld xmlns:a="http://schemas.openxmlformats.org/drawingml/2006/main" xmlns:r="http://schemas.openxmlformats.org/officeDocument/2006/relationships" xmlns:p="http://schemas.openxmlformats.org/presentationml/2006/main">
-  <p:cSld name="Slide 44">
+  <p:cSld name="Slide 48">
     <p:spTree>
       <p:nvGrpSpPr>
         <p:cNvPr id="1" name=""/>
@@ -17317,7 +19104,7 @@
       </p:sp>
       <p:graphicFrame>
         <p:nvGraphicFramePr>
-          <p:cNvPr id="45" name="Table 0"/>
+          <p:cNvPr id="49" name="Table 0"/>
           <p:cNvGraphicFramePr>
             <a:graphicFrameLocks noGrp="1"/>
           </p:cNvGraphicFramePr>
@@ -17427,7 +19214,7 @@
                           <a:ea typeface="Calibri" pitchFamily="34" charset="-122"/>
                           <a:cs typeface="Calibri" pitchFamily="34" charset="-120"/>
                         </a:rPr>
-                        <a:t>DEFINITIONS; The Rules; Worked Example.</a:t>
+                        <a:t>DEFINITIONS; Local Time from Longitude; Longitude from Local Time; Standard Time from Standard Time Zones; Time and Date across the International Date Line.</a:t>
                       </a:r>
                       <a:endParaRPr lang="en-US" sz="1600" dirty="0">
                         <a:latin typeface="Calibri" charset="0"/>
@@ -18077,7 +19864,7 @@
             <a:pPr algn="ctr"/>
             <a:fld id="{F7021451-1387-4CA6-816F-3879F97B5CBC}" type="slidenum">
               <a:rPr b="1" lang="en-US"/>
-              <a:t>44</a:t>
+              <a:t>48</a:t>
             </a:fld>
             <a:endParaRPr lang="en-US"/>
           </a:p>
@@ -18091,9 +19878,9 @@
 </p:sld>
 </file>
 
-<file path=ppt/slides/slide45.xml><?xml version="1.0" encoding="utf-8"?>
+<file path=ppt/slides/slide49.xml><?xml version="1.0" encoding="utf-8"?>
 <p:sld xmlns:a="http://schemas.openxmlformats.org/drawingml/2006/main" xmlns:r="http://schemas.openxmlformats.org/officeDocument/2006/relationships" xmlns:p="http://schemas.openxmlformats.org/presentationml/2006/main">
-  <p:cSld name="Slide 45">
+  <p:cSld name="Slide 49">
     <p:spTree>
       <p:nvGrpSpPr>
         <p:cNvPr id="1" name=""/>
@@ -18270,7 +20057,7 @@
                 <a:ea typeface="Calibri" pitchFamily="34" charset="-122"/>
                 <a:cs typeface="Calibri" pitchFamily="34" charset="-120"/>
               </a:rPr>
-              <a:t>Without the projector (Activity 1): write EAST = + and WEST = − on the board.</a:t>
+              <a:t>Without the projector (Activity 1): write the steps on the board.</a:t>
             </a:r>
             <a:endParaRPr lang="en-US" sz="2000" dirty="0"/>
           </a:p>
@@ -18291,7 +20078,7 @@
                 <a:ea typeface="Calibri" pitchFamily="34" charset="-122"/>
                 <a:cs typeface="Calibri" pitchFamily="34" charset="-120"/>
               </a:rPr>
-              <a:t>Without the projector (Activity 2): write the steps on the board.</a:t>
+              <a:t>Without the projector (Activity 2): draw the zones on the board.</a:t>
             </a:r>
             <a:endParaRPr lang="en-US" sz="2000" dirty="0"/>
           </a:p>
@@ -18360,269 +20147,7 @@
             <a:pPr algn="ctr"/>
             <a:fld id="{F7021451-1387-4CA6-816F-3879F97B5CBC}" type="slidenum">
               <a:rPr b="1" lang="en-US"/>
-              <a:t>45</a:t>
-            </a:fld>
-            <a:endParaRPr lang="en-US"/>
-          </a:p>
-        </p:txBody>
-      </p:sp>
-    </p:spTree>
-  </p:cSld>
-  <p:clrMapOvr>
-    <a:masterClrMapping/>
-  </p:clrMapOvr>
-</p:sld>
-</file>
-
-<file path=ppt/slides/slide46.xml><?xml version="1.0" encoding="utf-8"?>
-<p:sld xmlns:a="http://schemas.openxmlformats.org/drawingml/2006/main" xmlns:r="http://schemas.openxmlformats.org/officeDocument/2006/relationships" xmlns:p="http://schemas.openxmlformats.org/presentationml/2006/main">
-  <p:cSld name="Slide 46">
-    <p:spTree>
-      <p:nvGrpSpPr>
-        <p:cNvPr id="1" name=""/>
-        <p:cNvGrpSpPr/>
-        <p:nvPr/>
-      </p:nvGrpSpPr>
-      <p:grpSpPr>
-        <a:xfrm>
-          <a:off x="0" y="0"/>
-          <a:ext cx="0" cy="0"/>
-          <a:chOff x="0" y="0"/>
-          <a:chExt cx="0" cy="0"/>
-        </a:xfrm>
-      </p:grpSpPr>
-      <p:sp>
-        <p:nvSpPr>
-          <p:cNvPr id="2" name="Text 0"/>
-          <p:cNvSpPr/>
-          <p:nvPr/>
-        </p:nvSpPr>
-        <p:spPr>
-          <a:xfrm>
-            <a:off x="457200" y="713232"/>
-            <a:ext cx="11368735" cy="274320"/>
-          </a:xfrm>
-          <a:prstGeom prst="rect">
-            <a:avLst/>
-          </a:prstGeom>
-          <a:noFill/>
-          <a:ln/>
-        </p:spPr>
-        <p:txBody>
-          <a:bodyPr wrap="square" lIns="0" tIns="0" rIns="0" bIns="0" rtlCol="0" anchor="ctr"/>
-          <a:lstStyle/>
-          <a:p>
-            <a:pPr algn="r" indent="0" marL="0">
-              <a:buNone/>
-            </a:pPr>
-            <a:r>
-              <a:rPr lang="en-US" sz="1400" b="1" dirty="0">
-                <a:solidFill>
-                  <a:srgbClr val="1C3F6E"/>
-                </a:solidFill>
-                <a:latin typeface="Calibri" pitchFamily="34" charset="0"/>
-                <a:ea typeface="Calibri" pitchFamily="34" charset="-122"/>
-                <a:cs typeface="Calibri" pitchFamily="34" charset="-120"/>
-              </a:rPr>
-              <a:t>REFERENCES</a:t>
-            </a:r>
-            <a:endParaRPr lang="en-US" sz="1400" dirty="0"/>
-          </a:p>
-        </p:txBody>
-      </p:sp>
-      <p:pic>
-        <p:nvPicPr>
-          <p:cNvPr id="3" name="Image 0" descr="/home/claude/f4/img/minesec_sheet.png">    </p:cNvPr>
-          <p:cNvPicPr>
-            <a:picLocks noChangeAspect="1"/>
-          </p:cNvPicPr>
-          <p:nvPr/>
-        </p:nvPicPr>
-        <p:blipFill>
-          <a:blip r:embed="rId1"/>
-          <a:stretch>
-            <a:fillRect/>
-          </a:stretch>
-        </p:blipFill>
-        <p:spPr>
-          <a:xfrm>
-            <a:off x="0" y="658368"/>
-            <a:ext cx="5120640" cy="5833872"/>
-          </a:xfrm>
-          <a:prstGeom prst="rect">
-            <a:avLst/>
-          </a:prstGeom>
-        </p:spPr>
-      </p:pic>
-      <p:sp>
-        <p:nvSpPr>
-          <p:cNvPr id="4" name="Text 1"/>
-          <p:cNvSpPr/>
-          <p:nvPr/>
-        </p:nvSpPr>
-        <p:spPr>
-          <a:xfrm>
-            <a:off x="5349240" y="1005840"/>
-            <a:ext cx="6522415" cy="731520"/>
-          </a:xfrm>
-          <a:prstGeom prst="rect">
-            <a:avLst/>
-          </a:prstGeom>
-          <a:noFill/>
-          <a:ln/>
-        </p:spPr>
-        <p:txBody>
-          <a:bodyPr wrap="square" lIns="0" tIns="0" rIns="0" bIns="0" rtlCol="0" anchor="ctr">
-            <a:normAutofit/>
-          </a:bodyPr>
-          <a:lstStyle/>
-          <a:p>
-            <a:pPr algn="ctr" indent="0" marL="0">
-              <a:buNone/>
-            </a:pPr>
-            <a:r>
-              <a:rPr lang="en-US" sz="3600" b="1" dirty="0">
-                <a:solidFill>
-                  <a:srgbClr val="990011"/>
-                </a:solidFill>
-                <a:latin typeface="Times New Roman" pitchFamily="34" charset="0"/>
-                <a:ea typeface="Times New Roman" pitchFamily="34" charset="-122"/>
-                <a:cs typeface="Times New Roman" pitchFamily="34" charset="-120"/>
-              </a:rPr>
-              <a:t>References</a:t>
-            </a:r>
-            <a:endParaRPr lang="en-US" sz="3600" dirty="0"/>
-          </a:p>
-        </p:txBody>
-      </p:sp>
-      <p:sp>
-        <p:nvSpPr>
-          <p:cNvPr id="5" name="Text 2"/>
-          <p:cNvSpPr/>
-          <p:nvPr/>
-        </p:nvSpPr>
-        <p:spPr>
-          <a:xfrm>
-            <a:off x="5349240" y="1783080"/>
-            <a:ext cx="6522415" cy="4663440"/>
-          </a:xfrm>
-          <a:prstGeom prst="rect">
-            <a:avLst/>
-          </a:prstGeom>
-          <a:noFill/>
-          <a:ln/>
-        </p:spPr>
-        <p:txBody>
-          <a:bodyPr wrap="square" lIns="0" tIns="0" rIns="0" bIns="0" rtlCol="0" anchor="t"/>
-          <a:lstStyle/>
-          <a:p>
-            <a:pPr algn="l" marL="342900" indent="-342900">
-              <a:spcAft>
-                <a:spcPts val="800"/>
-              </a:spcAft>
-              <a:buSzPct val="100000"/>
-              <a:buChar char="•"/>
-            </a:pPr>
-            <a:r>
-              <a:rPr lang="en-US" sz="1800" dirty="0">
-                <a:solidFill>
-                  <a:srgbClr val="111111"/>
-                </a:solidFill>
-                <a:latin typeface="Calibri" pitchFamily="34" charset="0"/>
-                <a:ea typeface="Calibri" pitchFamily="34" charset="-122"/>
-                <a:cs typeface="Calibri" pitchFamily="34" charset="-120"/>
-              </a:rPr>
-              <a:t>National Geography Syllabus (MINESEC), Form 4 — The Earth as a Planet in the Solar System.</a:t>
-            </a:r>
-            <a:endParaRPr lang="en-US" sz="1800" dirty="0"/>
-          </a:p>
-          <a:p>
-            <a:pPr algn="l" marL="342900" indent="-342900">
-              <a:spcAft>
-                <a:spcPts val="800"/>
-              </a:spcAft>
-              <a:buSzPct val="100000"/>
-              <a:buChar char="•"/>
-            </a:pPr>
-            <a:r>
-              <a:rPr lang="en-US" sz="1800" dirty="0">
-                <a:solidFill>
-                  <a:srgbClr val="111111"/>
-                </a:solidFill>
-                <a:latin typeface="Calibri" pitchFamily="34" charset="0"/>
-                <a:ea typeface="Calibri" pitchFamily="34" charset="-122"/>
-                <a:cs typeface="Calibri" pitchFamily="34" charset="-120"/>
-              </a:rPr>
-              <a:t>Teacher's lesson notes (Form 4), checked and corrected where necessary.</a:t>
-            </a:r>
-            <a:endParaRPr lang="en-US" sz="1800" dirty="0"/>
-          </a:p>
-          <a:p>
-            <a:pPr algn="l" marL="342900" indent="-342900">
-              <a:spcAft>
-                <a:spcPts val="800"/>
-              </a:spcAft>
-              <a:buSzPct val="100000"/>
-              <a:buChar char="•"/>
-            </a:pPr>
-            <a:r>
-              <a:rPr lang="en-US" sz="1800" dirty="0">
-                <a:solidFill>
-                  <a:srgbClr val="111111"/>
-                </a:solidFill>
-                <a:latin typeface="Calibri" pitchFamily="34" charset="0"/>
-                <a:ea typeface="Calibri" pitchFamily="34" charset="-122"/>
-                <a:cs typeface="Calibri" pitchFamily="34" charset="-120"/>
-              </a:rPr>
-              <a:t>Diagrams and animations: drawn for this lesson (Geography Department).</a:t>
-            </a:r>
-            <a:endParaRPr lang="en-US" sz="1800" dirty="0"/>
-          </a:p>
-        </p:txBody>
-      </p:sp>
-      <p:sp>
-        <p:nvSpPr>
-          <p:cNvPr id="25" name="Slide Number Placeholder 0"/>
-          <p:cNvSpPr>
-            <a:spLocks noGrp="1"/>
-          </p:cNvSpPr>
-          <p:nvPr>
-            <p:ph type="sldNum" sz="quarter" idx="4294967295"/>
-          </p:nvPr>
-        </p:nvSpPr>
-        <p:spPr>
-          <a:xfrm>
-            <a:off x="27432" y="91440"/>
-            <a:ext cx="585216" cy="475488"/>
-          </a:xfrm>
-          <a:prstGeom prst="rect">
-            <a:avLst/>
-          </a:prstGeom>
-          <a:extLst>
-            <a:ext uri="{C572A759-6A51-4108-AA02-DFA0A04FC94B}">
-              <ma14:wrappingTextBoxFlag xmlns:ma14="http://schemas.microsoft.com/office/mac/drawingml/2011/main" val="0"/>
-            </a:ext>
-          </a:extLst>
-        </p:spPr>
-        <p:txBody>
-          <a:bodyPr/>
-          <a:lstStyle>
-            <a:lvl1pPr>
-              <a:defRPr sz="2000">
-                <a:solidFill>
-                  <a:srgbClr val="FFFFFF"/>
-                </a:solidFill>
-                <a:latin typeface="Calibri"/>
-                <a:ea typeface="Calibri"/>
-                <a:cs typeface="Calibri"/>
-              </a:defRPr>
-            </a:lvl1pPr>
-          </a:lstStyle>
-          <a:p>
-            <a:pPr algn="ctr"/>
-            <a:fld id="{F7021451-1387-4CA6-816F-3879F97B5CBC}" type="slidenum">
-              <a:rPr b="1" lang="en-US"/>
-              <a:t>46</a:t>
+              <a:t>49</a:t>
             </a:fld>
             <a:endParaRPr lang="en-US"/>
           </a:p>
@@ -18842,6 +20367,268 @@
             <a:fld id="{F7021451-1387-4CA6-816F-3879F97B5CBC}" type="slidenum">
               <a:rPr b="1" lang="en-US"/>
               <a:t>5</a:t>
+            </a:fld>
+            <a:endParaRPr lang="en-US"/>
+          </a:p>
+        </p:txBody>
+      </p:sp>
+    </p:spTree>
+  </p:cSld>
+  <p:clrMapOvr>
+    <a:masterClrMapping/>
+  </p:clrMapOvr>
+</p:sld>
+</file>
+
+<file path=ppt/slides/slide50.xml><?xml version="1.0" encoding="utf-8"?>
+<p:sld xmlns:a="http://schemas.openxmlformats.org/drawingml/2006/main" xmlns:r="http://schemas.openxmlformats.org/officeDocument/2006/relationships" xmlns:p="http://schemas.openxmlformats.org/presentationml/2006/main">
+  <p:cSld name="Slide 50">
+    <p:spTree>
+      <p:nvGrpSpPr>
+        <p:cNvPr id="1" name=""/>
+        <p:cNvGrpSpPr/>
+        <p:nvPr/>
+      </p:nvGrpSpPr>
+      <p:grpSpPr>
+        <a:xfrm>
+          <a:off x="0" y="0"/>
+          <a:ext cx="0" cy="0"/>
+          <a:chOff x="0" y="0"/>
+          <a:chExt cx="0" cy="0"/>
+        </a:xfrm>
+      </p:grpSpPr>
+      <p:sp>
+        <p:nvSpPr>
+          <p:cNvPr id="2" name="Text 0"/>
+          <p:cNvSpPr/>
+          <p:nvPr/>
+        </p:nvSpPr>
+        <p:spPr>
+          <a:xfrm>
+            <a:off x="457200" y="713232"/>
+            <a:ext cx="11368735" cy="274320"/>
+          </a:xfrm>
+          <a:prstGeom prst="rect">
+            <a:avLst/>
+          </a:prstGeom>
+          <a:noFill/>
+          <a:ln/>
+        </p:spPr>
+        <p:txBody>
+          <a:bodyPr wrap="square" lIns="0" tIns="0" rIns="0" bIns="0" rtlCol="0" anchor="ctr"/>
+          <a:lstStyle/>
+          <a:p>
+            <a:pPr algn="r" indent="0" marL="0">
+              <a:buNone/>
+            </a:pPr>
+            <a:r>
+              <a:rPr lang="en-US" sz="1400" b="1" dirty="0">
+                <a:solidFill>
+                  <a:srgbClr val="1C3F6E"/>
+                </a:solidFill>
+                <a:latin typeface="Calibri" pitchFamily="34" charset="0"/>
+                <a:ea typeface="Calibri" pitchFamily="34" charset="-122"/>
+                <a:cs typeface="Calibri" pitchFamily="34" charset="-120"/>
+              </a:rPr>
+              <a:t>REFERENCES</a:t>
+            </a:r>
+            <a:endParaRPr lang="en-US" sz="1400" dirty="0"/>
+          </a:p>
+        </p:txBody>
+      </p:sp>
+      <p:pic>
+        <p:nvPicPr>
+          <p:cNvPr id="3" name="Image 0" descr="/home/claude/f4/img/minesec_sheet.png">    </p:cNvPr>
+          <p:cNvPicPr>
+            <a:picLocks noChangeAspect="1"/>
+          </p:cNvPicPr>
+          <p:nvPr/>
+        </p:nvPicPr>
+        <p:blipFill>
+          <a:blip r:embed="rId1"/>
+          <a:stretch>
+            <a:fillRect/>
+          </a:stretch>
+        </p:blipFill>
+        <p:spPr>
+          <a:xfrm>
+            <a:off x="0" y="658368"/>
+            <a:ext cx="5120640" cy="5833872"/>
+          </a:xfrm>
+          <a:prstGeom prst="rect">
+            <a:avLst/>
+          </a:prstGeom>
+        </p:spPr>
+      </p:pic>
+      <p:sp>
+        <p:nvSpPr>
+          <p:cNvPr id="4" name="Text 1"/>
+          <p:cNvSpPr/>
+          <p:nvPr/>
+        </p:nvSpPr>
+        <p:spPr>
+          <a:xfrm>
+            <a:off x="5349240" y="1005840"/>
+            <a:ext cx="6522415" cy="731520"/>
+          </a:xfrm>
+          <a:prstGeom prst="rect">
+            <a:avLst/>
+          </a:prstGeom>
+          <a:noFill/>
+          <a:ln/>
+        </p:spPr>
+        <p:txBody>
+          <a:bodyPr wrap="square" lIns="0" tIns="0" rIns="0" bIns="0" rtlCol="0" anchor="ctr">
+            <a:normAutofit/>
+          </a:bodyPr>
+          <a:lstStyle/>
+          <a:p>
+            <a:pPr algn="ctr" indent="0" marL="0">
+              <a:buNone/>
+            </a:pPr>
+            <a:r>
+              <a:rPr lang="en-US" sz="3600" b="1" dirty="0">
+                <a:solidFill>
+                  <a:srgbClr val="990011"/>
+                </a:solidFill>
+                <a:latin typeface="Times New Roman" pitchFamily="34" charset="0"/>
+                <a:ea typeface="Times New Roman" pitchFamily="34" charset="-122"/>
+                <a:cs typeface="Times New Roman" pitchFamily="34" charset="-120"/>
+              </a:rPr>
+              <a:t>References</a:t>
+            </a:r>
+            <a:endParaRPr lang="en-US" sz="3600" dirty="0"/>
+          </a:p>
+        </p:txBody>
+      </p:sp>
+      <p:sp>
+        <p:nvSpPr>
+          <p:cNvPr id="5" name="Text 2"/>
+          <p:cNvSpPr/>
+          <p:nvPr/>
+        </p:nvSpPr>
+        <p:spPr>
+          <a:xfrm>
+            <a:off x="5349240" y="1783080"/>
+            <a:ext cx="6522415" cy="4663440"/>
+          </a:xfrm>
+          <a:prstGeom prst="rect">
+            <a:avLst/>
+          </a:prstGeom>
+          <a:noFill/>
+          <a:ln/>
+        </p:spPr>
+        <p:txBody>
+          <a:bodyPr wrap="square" lIns="0" tIns="0" rIns="0" bIns="0" rtlCol="0" anchor="t"/>
+          <a:lstStyle/>
+          <a:p>
+            <a:pPr algn="l" marL="342900" indent="-342900">
+              <a:spcAft>
+                <a:spcPts val="800"/>
+              </a:spcAft>
+              <a:buSzPct val="100000"/>
+              <a:buChar char="•"/>
+            </a:pPr>
+            <a:r>
+              <a:rPr lang="en-US" sz="1800" dirty="0">
+                <a:solidFill>
+                  <a:srgbClr val="111111"/>
+                </a:solidFill>
+                <a:latin typeface="Calibri" pitchFamily="34" charset="0"/>
+                <a:ea typeface="Calibri" pitchFamily="34" charset="-122"/>
+                <a:cs typeface="Calibri" pitchFamily="34" charset="-120"/>
+              </a:rPr>
+              <a:t>National Geography Syllabus (MINESEC), Form 4 — The Earth as a Planet in the Solar System.</a:t>
+            </a:r>
+            <a:endParaRPr lang="en-US" sz="1800" dirty="0"/>
+          </a:p>
+          <a:p>
+            <a:pPr algn="l" marL="342900" indent="-342900">
+              <a:spcAft>
+                <a:spcPts val="800"/>
+              </a:spcAft>
+              <a:buSzPct val="100000"/>
+              <a:buChar char="•"/>
+            </a:pPr>
+            <a:r>
+              <a:rPr lang="en-US" sz="1800" dirty="0">
+                <a:solidFill>
+                  <a:srgbClr val="111111"/>
+                </a:solidFill>
+                <a:latin typeface="Calibri" pitchFamily="34" charset="0"/>
+                <a:ea typeface="Calibri" pitchFamily="34" charset="-122"/>
+                <a:cs typeface="Calibri" pitchFamily="34" charset="-120"/>
+              </a:rPr>
+              <a:t>Teacher's lesson notes (Form 4), checked and corrected where necessary.</a:t>
+            </a:r>
+            <a:endParaRPr lang="en-US" sz="1800" dirty="0"/>
+          </a:p>
+          <a:p>
+            <a:pPr algn="l" marL="342900" indent="-342900">
+              <a:spcAft>
+                <a:spcPts val="800"/>
+              </a:spcAft>
+              <a:buSzPct val="100000"/>
+              <a:buChar char="•"/>
+            </a:pPr>
+            <a:r>
+              <a:rPr lang="en-US" sz="1800" dirty="0">
+                <a:solidFill>
+                  <a:srgbClr val="111111"/>
+                </a:solidFill>
+                <a:latin typeface="Calibri" pitchFamily="34" charset="0"/>
+                <a:ea typeface="Calibri" pitchFamily="34" charset="-122"/>
+                <a:cs typeface="Calibri" pitchFamily="34" charset="-120"/>
+              </a:rPr>
+              <a:t>Diagrams and animations: drawn for this lesson (Geography Department).</a:t>
+            </a:r>
+            <a:endParaRPr lang="en-US" sz="1800" dirty="0"/>
+          </a:p>
+        </p:txBody>
+      </p:sp>
+      <p:sp>
+        <p:nvSpPr>
+          <p:cNvPr id="25" name="Slide Number Placeholder 0"/>
+          <p:cNvSpPr>
+            <a:spLocks noGrp="1"/>
+          </p:cNvSpPr>
+          <p:nvPr>
+            <p:ph type="sldNum" sz="quarter" idx="4294967295"/>
+          </p:nvPr>
+        </p:nvSpPr>
+        <p:spPr>
+          <a:xfrm>
+            <a:off x="27432" y="91440"/>
+            <a:ext cx="585216" cy="475488"/>
+          </a:xfrm>
+          <a:prstGeom prst="rect">
+            <a:avLst/>
+          </a:prstGeom>
+          <a:extLst>
+            <a:ext uri="{C572A759-6A51-4108-AA02-DFA0A04FC94B}">
+              <ma14:wrappingTextBoxFlag xmlns:ma14="http://schemas.microsoft.com/office/mac/drawingml/2011/main" val="0"/>
+            </a:ext>
+          </a:extLst>
+        </p:spPr>
+        <p:txBody>
+          <a:bodyPr/>
+          <a:lstStyle>
+            <a:lvl1pPr>
+              <a:defRPr sz="2000">
+                <a:solidFill>
+                  <a:srgbClr val="FFFFFF"/>
+                </a:solidFill>
+                <a:latin typeface="Calibri"/>
+                <a:ea typeface="Calibri"/>
+                <a:cs typeface="Calibri"/>
+              </a:defRPr>
+            </a:lvl1pPr>
+          </a:lstStyle>
+          <a:p>
+            <a:pPr algn="ctr"/>
+            <a:fld id="{F7021451-1387-4CA6-816F-3879F97B5CBC}" type="slidenum">
+              <a:rPr b="1" lang="en-US"/>
+              <a:t>50</a:t>
             </a:fld>
             <a:endParaRPr lang="en-US"/>
           </a:p>

--- a/lecons/F3/07_FORM4_PRACTICAL_WORK2_Calculation_of_Time_and_Date.pptx
+++ b/lecons/F3/07_FORM4_PRACTICAL_WORK2_Calculation_of_Time_and_Date.pptx
@@ -2575,7 +2575,7 @@
           <a:p>
             <a:r>
               <a:rPr lang="en-US" dirty="0"/>
-              <a:t>Let us copy Local Time from Longitude. Local time is calculated from longitude with the following rules. Copy the point on Difference of longitude on the left, then draw the diagram on the right: calculating sun time. Give it a title and label it clearly.</a:t>
+              <a:t>Let us copy Local Time from Longitude. Local time is calculated from longitude as follows. Copy the point on Difference of longitude on the left, then draw the diagram on the right: calculating sun time. Give it a title and label it clearly.</a:t>
             </a:r>
             <a:endParaRPr lang="en-US" dirty="0"/>
           </a:p>
@@ -2839,7 +2839,7 @@
           <a:p>
             <a:r>
               <a:rPr lang="en-US" dirty="0"/>
-              <a:t>Let us copy Longitude from Local Time. Longitude is calculated from local time with the following rules. On this slide we have Time difference and Difference of longitude. Write each point on a new line, with the key term first, and explain it in your own words when we revise. When you finish, we go to the next slide.</a:t>
+              <a:t>Let us copy Longitude from Local Time. Longitude is calculated from local time as follows. On this slide we have Time difference and Difference of longitude. Write each point on a new line, with the key term first, and explain it in your own words when we revise. When you finish, we go to the next slide.</a:t>
             </a:r>
             <a:endParaRPr lang="en-US" dirty="0"/>
           </a:p>
@@ -12427,7 +12427,7 @@
                 <a:ea typeface="Times New Roman" pitchFamily="34" charset="-122"/>
                 <a:cs typeface="Times New Roman" pitchFamily="34" charset="-120"/>
               </a:rPr>
-              <a:t>Local time is calculated from longitude with the following rules:</a:t>
+              <a:t>Local time is calculated from longitude as follows:</a:t>
             </a:r>
             <a:endParaRPr lang="en-US" sz="3200" dirty="0"/>
           </a:p>
@@ -13372,7 +13372,7 @@
                 <a:ea typeface="Times New Roman" pitchFamily="34" charset="-122"/>
                 <a:cs typeface="Times New Roman" pitchFamily="34" charset="-120"/>
               </a:rPr>
-              <a:t>Longitude is calculated from local time with the following rules:</a:t>
+              <a:t>Longitude is calculated from local time as follows:</a:t>
             </a:r>
             <a:endParaRPr lang="en-US" sz="4000" dirty="0"/>
           </a:p>

--- a/lecons/F3/07_FORM4_PRACTICAL_WORK2_Calculation_of_Time_and_Date.pptx
+++ b/lecons/F3/07_FORM4_PRACTICAL_WORK2_Calculation_of_Time_and_Date.pptx
@@ -3455,7 +3455,7 @@
           <a:p>
             <a:r>
               <a:rPr lang="en-US" dirty="0"/>
-              <a:t>Before we start the new lesson, let us correct the homework I gave you at the end of Lesson 4: Local Time, Standard Time and Time Zones. The question was: Find the time in Garoua when it is 12 noon in London in winter (GMT). Then try: what time is it in a town at 45° E when it is 12 noon at 0°? Take out your exercise books.</a:t>
+              <a:t>Before we start the new lesson, let us correct the homework I gave you at the end of Lesson 4: Local Time, Standard Time and Time Zones. The question was: Calculate the local time at 30° E when it is 12:00 at 0°. Take out your exercise books.</a:t>
             </a:r>
             <a:endParaRPr lang="en-US" dirty="0"/>
           </a:p>
@@ -3895,7 +3895,7 @@
           <a:p>
             <a:r>
               <a:rPr lang="en-US" dirty="0"/>
-              <a:t>For your homework: Watch the sunrise and the sunset one day this week and write down the times. Write a sentence to explain why the Sun rises in the east. We shall correct it at the beginning of our next lesson.</a:t>
+              <a:t>For your homework: Define the rotation of the Earth. We shall correct it at the beginning of our next lesson.</a:t>
             </a:r>
             <a:endParaRPr lang="en-US" dirty="0"/>
           </a:p>
@@ -4423,7 +4423,7 @@
           <a:p>
             <a:r>
               <a:rPr lang="en-US" dirty="0"/>
-              <a:t>Here is a good answer. When it is 12 noon GMT, Garoua (GMT + 1) is at 13:00. A town at 45° E: 45 × 4 min = 180 min = 3 h ahead, so it is 15:00. Compare it with your own answer and correct your work in red.</a:t>
+              <a:t>Here is a good answer. 30 × 4 = 120 minutes = 2 hours ahead, so 14:00. Compare it with your own answer and correct your work in red.</a:t>
             </a:r>
             <a:endParaRPr lang="en-US" dirty="0"/>
           </a:p>
@@ -15285,7 +15285,7 @@
         <p:spPr>
           <a:xfrm>
             <a:off x="0" y="658368"/>
-            <a:ext cx="3840480" cy="5833872"/>
+            <a:ext cx="5120640" cy="5833872"/>
           </a:xfrm>
           <a:prstGeom prst="rect">
             <a:avLst/>
@@ -15300,8 +15300,8 @@
         </p:nvSpPr>
         <p:spPr>
           <a:xfrm>
-            <a:off x="4069080" y="1005840"/>
-            <a:ext cx="7802575" cy="731520"/>
+            <a:off x="5349240" y="1005840"/>
+            <a:ext cx="6522415" cy="731520"/>
           </a:xfrm>
           <a:prstGeom prst="rect">
             <a:avLst/>
@@ -15341,8 +15341,8 @@
         </p:nvSpPr>
         <p:spPr>
           <a:xfrm>
-            <a:off x="4069080" y="1783080"/>
-            <a:ext cx="7802575" cy="4663440"/>
+            <a:off x="5349240" y="1783080"/>
+            <a:ext cx="6522415" cy="4663440"/>
           </a:xfrm>
           <a:prstGeom prst="rect">
             <a:avLst/>
@@ -15389,7 +15389,7 @@
                 <a:ea typeface="Times New Roman" pitchFamily="34" charset="-122"/>
                 <a:cs typeface="Times New Roman" pitchFamily="34" charset="-120"/>
               </a:rPr>
-              <a:t>Find the time in Garoua when it is 12 noon in London in winter (GMT). Then try: what time is it in a town at 45° E when it is 12 noon at 0°?</a:t>
+              <a:t>Calculate the local time at 30° E when it is 12:00 at 0°.</a:t>
             </a:r>
             <a:endParaRPr lang="en-US" sz="4000" dirty="0"/>
           </a:p>
@@ -16550,7 +16550,7 @@
                 <a:ea typeface="Times New Roman" pitchFamily="34" charset="-122"/>
                 <a:cs typeface="Times New Roman" pitchFamily="34" charset="-120"/>
               </a:rPr>
-              <a:t>Watch the sunrise and the sunset one day this week and write down the times. Write a sentence to explain why the Sun rises in the east.</a:t>
+              <a:t>Define the rotation of the Earth.</a:t>
             </a:r>
             <a:endParaRPr lang="en-US" sz="4000" dirty="0"/>
           </a:p>
@@ -19490,7 +19490,7 @@
                           <a:ea typeface="Calibri" pitchFamily="34" charset="-122"/>
                           <a:cs typeface="Calibri" pitchFamily="34" charset="-120"/>
                         </a:rPr>
-                        <a:t>Watch the sunrise and the sunset one day this week and write down the times. Write a sentence to explain why the Sun rises in the east.</a:t>
+                        <a:t>Define the rotation of the Earth.</a:t>
                       </a:r>
                       <a:endParaRPr lang="en-US" sz="1600" dirty="0">
                         <a:latin typeface="Calibri" charset="0"/>
@@ -20318,7 +20318,7 @@
                 <a:ea typeface="Times New Roman" pitchFamily="34" charset="-122"/>
                 <a:cs typeface="Times New Roman" pitchFamily="34" charset="-120"/>
               </a:rPr>
-              <a:t>When it is 12 noon GMT, Garoua (GMT + 1) is at 13:00. A town at 45° E: 45 × 4 min = 180 min = 3 h ahead, so it is 15:00.</a:t>
+              <a:t>30 × 4 = 120 minutes = 2 hours ahead, so 14:00.</a:t>
             </a:r>
             <a:endParaRPr lang="en-US" sz="4000" dirty="0"/>
           </a:p>
